--- a/2026-27/S12/MLOps_S12_Video2_AI_Governance.pptx
+++ b/2026-27/S12/MLOps_S12_Video2_AI_Governance.pptx
@@ -2664,7 +2664,7 @@
                 <a:ea typeface="Calibri" pitchFamily="34" charset="-122"/>
                 <a:cs typeface="Calibri" pitchFamily="34" charset="-120"/>
               </a:rPr>
-              <a:t>Master in Business Analytics and Big Data</a:t>
+              <a:t>Master in Business Analytics and Data Science</a:t>
             </a:r>
             <a:endParaRPr lang="en-US" sz="900" dirty="0"/>
           </a:p>
@@ -2703,7 +2703,7 @@
                 <a:ea typeface="Calibri" pitchFamily="34" charset="-122"/>
                 <a:cs typeface="Calibri" pitchFamily="34" charset="-120"/>
               </a:rPr>
-              <a:t>MLOps · MBABD-PT 2026–27 · Video 2 (Session 12) · AI Governance &amp; Regulatory Readiness · Juan Ramírez</a:t>
+              <a:t>MLOps · MBDS-PT2026F · Video 2 (Session 12) · AI Governance &amp; Regulatory Readiness · Juan Ramírez</a:t>
             </a:r>
             <a:endParaRPr lang="en-US" sz="800" dirty="0"/>
           </a:p>
@@ -2969,6 +2969,10 @@
             <a:prstDash val="solid"/>
           </a:ln>
         </p:spPr>
+        <p:txBody>
+          <a:bodyPr/>
+          <a:p/>
+        </p:txBody>
       </p:sp>
       <p:sp>
         <p:nvSpPr>
@@ -3035,6 +3039,10 @@
             <a:prstDash val="solid"/>
           </a:ln>
         </p:spPr>
+        <p:txBody>
+          <a:bodyPr/>
+          <a:p/>
+        </p:txBody>
       </p:sp>
       <p:sp>
         <p:nvSpPr>
@@ -3101,6 +3109,10 @@
             <a:prstDash val="solid"/>
           </a:ln>
         </p:spPr>
+        <p:txBody>
+          <a:bodyPr/>
+          <a:p/>
+        </p:txBody>
       </p:sp>
       <p:sp>
         <p:nvSpPr>
@@ -3167,6 +3179,10 @@
             <a:prstDash val="solid"/>
           </a:ln>
         </p:spPr>
+        <p:txBody>
+          <a:bodyPr/>
+          <a:p/>
+        </p:txBody>
       </p:sp>
       <p:sp>
         <p:nvSpPr>
@@ -3233,6 +3249,10 @@
             <a:prstDash val="solid"/>
           </a:ln>
         </p:spPr>
+        <p:txBody>
+          <a:bodyPr/>
+          <a:p/>
+        </p:txBody>
       </p:sp>
       <p:sp>
         <p:nvSpPr>
@@ -3299,6 +3319,10 @@
             <a:prstDash val="solid"/>
           </a:ln>
         </p:spPr>
+        <p:txBody>
+          <a:bodyPr/>
+          <a:p/>
+        </p:txBody>
       </p:sp>
       <p:sp>
         <p:nvSpPr>
@@ -3365,6 +3389,10 @@
             <a:prstDash val="solid"/>
           </a:ln>
         </p:spPr>
+        <p:txBody>
+          <a:bodyPr/>
+          <a:p/>
+        </p:txBody>
       </p:sp>
       <p:sp>
         <p:nvSpPr>
@@ -3431,6 +3459,10 @@
             <a:prstDash val="solid"/>
           </a:ln>
         </p:spPr>
+        <p:txBody>
+          <a:bodyPr/>
+          <a:p/>
+        </p:txBody>
       </p:sp>
       <p:sp>
         <p:nvSpPr>
@@ -3497,6 +3529,10 @@
             <a:prstDash val="solid"/>
           </a:ln>
         </p:spPr>
+        <p:txBody>
+          <a:bodyPr/>
+          <a:p/>
+        </p:txBody>
       </p:sp>
       <p:sp>
         <p:nvSpPr>
@@ -3537,6 +3573,30 @@
           </a:p>
         </p:txBody>
       </p:sp>
+      <p:pic>
+        <p:nvPicPr>
+          <p:cNvPr id="28" name="IE University logo" descr="IE University, School of Science &amp; Technology"/>
+          <p:cNvPicPr>
+            <a:picLocks noChangeAspect="1"/>
+          </p:cNvPicPr>
+          <p:nvPr/>
+        </p:nvPicPr>
+        <p:blipFill>
+          <a:blip r:embed="rId3"/>
+          <a:stretch>
+            <a:fillRect/>
+          </a:stretch>
+        </p:blipFill>
+        <p:spPr>
+          <a:xfrm>
+            <a:off x="8252653" y="109728"/>
+            <a:ext cx="525587" cy="704395"/>
+          </a:xfrm>
+          <a:prstGeom prst="rect">
+            <a:avLst/>
+          </a:prstGeom>
+        </p:spPr>
+      </p:pic>
     </p:spTree>
   </p:cSld>
   <p:clrMapOvr>
@@ -3602,7 +3662,7 @@
                 <a:ea typeface="Calibri" pitchFamily="34" charset="-122"/>
                 <a:cs typeface="Calibri" pitchFamily="34" charset="-120"/>
               </a:rPr>
-              <a:t>Master in Business Analytics and Big Data</a:t>
+              <a:t>Master in Business Analytics and Data Science</a:t>
             </a:r>
             <a:endParaRPr lang="en-US" sz="900" dirty="0"/>
           </a:p>
@@ -3641,7 +3701,7 @@
                 <a:ea typeface="Calibri" pitchFamily="34" charset="-122"/>
                 <a:cs typeface="Calibri" pitchFamily="34" charset="-120"/>
               </a:rPr>
-              <a:t>MLOps · MBABD-PT 2026–27 · Video 2 (Session 12) · AI Governance &amp; Regulatory Readiness · Juan Ramírez</a:t>
+              <a:t>MLOps · MBDS-PT2026F · Video 2 (Session 12) · AI Governance &amp; Regulatory Readiness · Juan Ramírez</a:t>
             </a:r>
             <a:endParaRPr lang="en-US" sz="800" dirty="0"/>
           </a:p>
@@ -3733,7 +3793,7 @@
         </p:nvSpPr>
         <p:spPr>
           <a:xfrm>
-            <a:off x="5806440" y="82296"/>
+            <a:off x="4950367" y="82296"/>
             <a:ext cx="2971800" cy="246888"/>
           </a:xfrm>
           <a:prstGeom prst="roundRect">
@@ -3751,6 +3811,10 @@
             <a:prstDash val="solid"/>
           </a:ln>
         </p:spPr>
+        <p:txBody>
+          <a:bodyPr/>
+          <a:p/>
+        </p:txBody>
       </p:sp>
       <p:sp>
         <p:nvSpPr>
@@ -3760,7 +3824,7 @@
         </p:nvSpPr>
         <p:spPr>
           <a:xfrm>
-            <a:off x="5806440" y="82296"/>
+            <a:off x="4950367" y="82296"/>
             <a:ext cx="2971800" cy="246888"/>
           </a:xfrm>
           <a:prstGeom prst="rect">
@@ -4418,6 +4482,10 @@
             <a:prstDash val="solid"/>
           </a:ln>
         </p:spPr>
+        <p:txBody>
+          <a:bodyPr/>
+          <a:p/>
+        </p:txBody>
       </p:sp>
       <p:sp>
         <p:nvSpPr>
@@ -4560,6 +4628,10 @@
             <a:prstDash val="solid"/>
           </a:ln>
         </p:spPr>
+        <p:txBody>
+          <a:bodyPr/>
+          <a:p/>
+        </p:txBody>
       </p:sp>
       <p:sp>
         <p:nvSpPr>
@@ -4702,6 +4774,10 @@
             <a:prstDash val="solid"/>
           </a:ln>
         </p:spPr>
+        <p:txBody>
+          <a:bodyPr/>
+          <a:p/>
+        </p:txBody>
       </p:sp>
       <p:sp>
         <p:nvSpPr>
@@ -4846,6 +4922,10 @@
             <a:prstDash val="solid"/>
           </a:ln>
         </p:spPr>
+        <p:txBody>
+          <a:bodyPr/>
+          <a:p/>
+        </p:txBody>
       </p:sp>
       <p:pic>
         <p:nvPicPr>
@@ -4910,6 +4990,30 @@
           </a:p>
         </p:txBody>
       </p:sp>
+      <p:pic>
+        <p:nvPicPr>
+          <p:cNvPr id="26" name="IE University logo" descr="IE University, School of Science &amp; Technology"/>
+          <p:cNvPicPr>
+            <a:picLocks noChangeAspect="1"/>
+          </p:cNvPicPr>
+          <p:nvPr/>
+        </p:nvPicPr>
+        <p:blipFill>
+          <a:blip r:embed="rId4"/>
+          <a:stretch>
+            <a:fillRect/>
+          </a:stretch>
+        </p:blipFill>
+        <p:spPr>
+          <a:xfrm>
+            <a:off x="8013607" y="92634"/>
+            <a:ext cx="764633" cy="262789"/>
+          </a:xfrm>
+          <a:prstGeom prst="rect">
+            <a:avLst/>
+          </a:prstGeom>
+        </p:spPr>
+      </p:pic>
     </p:spTree>
   </p:cSld>
   <p:clrMapOvr>
@@ -4975,7 +5079,7 @@
                 <a:ea typeface="Calibri" pitchFamily="34" charset="-122"/>
                 <a:cs typeface="Calibri" pitchFamily="34" charset="-120"/>
               </a:rPr>
-              <a:t>Master in Business Analytics and Big Data</a:t>
+              <a:t>Master in Business Analytics and Data Science</a:t>
             </a:r>
             <a:endParaRPr lang="en-US" sz="900" dirty="0"/>
           </a:p>
@@ -5014,7 +5118,7 @@
                 <a:ea typeface="Calibri" pitchFamily="34" charset="-122"/>
                 <a:cs typeface="Calibri" pitchFamily="34" charset="-120"/>
               </a:rPr>
-              <a:t>MLOps · MBABD-PT 2026–27 · Video 2 (Session 12) · AI Governance &amp; Regulatory Readiness · Juan Ramírez</a:t>
+              <a:t>MLOps · MBDS-PT2026F · Video 2 (Session 12) · AI Governance &amp; Regulatory Readiness · Juan Ramírez</a:t>
             </a:r>
             <a:endParaRPr lang="en-US" sz="800" dirty="0"/>
           </a:p>
@@ -5106,7 +5210,7 @@
         </p:nvSpPr>
         <p:spPr>
           <a:xfrm>
-            <a:off x="5806440" y="82296"/>
+            <a:off x="4950367" y="82296"/>
             <a:ext cx="2971800" cy="246888"/>
           </a:xfrm>
           <a:prstGeom prst="roundRect">
@@ -5124,6 +5228,10 @@
             <a:prstDash val="solid"/>
           </a:ln>
         </p:spPr>
+        <p:txBody>
+          <a:bodyPr/>
+          <a:p/>
+        </p:txBody>
       </p:sp>
       <p:sp>
         <p:nvSpPr>
@@ -5133,7 +5241,7 @@
         </p:nvSpPr>
         <p:spPr>
           <a:xfrm>
-            <a:off x="5806440" y="82296"/>
+            <a:off x="4950367" y="82296"/>
             <a:ext cx="2971800" cy="246888"/>
           </a:xfrm>
           <a:prstGeom prst="rect">
@@ -5190,6 +5298,10 @@
             <a:prstDash val="solid"/>
           </a:ln>
         </p:spPr>
+        <p:txBody>
+          <a:bodyPr/>
+          <a:p/>
+        </p:txBody>
       </p:sp>
       <p:pic>
         <p:nvPicPr>
@@ -5294,6 +5406,10 @@
             <a:prstDash val="solid"/>
           </a:ln>
         </p:spPr>
+        <p:txBody>
+          <a:bodyPr/>
+          <a:p/>
+        </p:txBody>
       </p:sp>
       <p:sp>
         <p:nvSpPr>
@@ -5319,6 +5435,10 @@
             <a:prstDash val="solid"/>
           </a:ln>
         </p:spPr>
+        <p:txBody>
+          <a:bodyPr/>
+          <a:p/>
+        </p:txBody>
       </p:sp>
       <p:pic>
         <p:nvPicPr>
@@ -5470,6 +5590,10 @@
             <a:tailEnd type="triangle"/>
           </a:ln>
         </p:spPr>
+        <p:txBody>
+          <a:bodyPr/>
+          <a:p/>
+        </p:txBody>
       </p:sp>
       <p:sp>
         <p:nvSpPr>
@@ -5497,6 +5621,10 @@
             <a:prstDash val="solid"/>
           </a:ln>
         </p:spPr>
+        <p:txBody>
+          <a:bodyPr/>
+          <a:p/>
+        </p:txBody>
       </p:sp>
       <p:sp>
         <p:nvSpPr>
@@ -5522,6 +5650,10 @@
             <a:prstDash val="solid"/>
           </a:ln>
         </p:spPr>
+        <p:txBody>
+          <a:bodyPr/>
+          <a:p/>
+        </p:txBody>
       </p:sp>
       <p:pic>
         <p:nvPicPr>
@@ -5673,6 +5805,10 @@
             <a:tailEnd type="triangle"/>
           </a:ln>
         </p:spPr>
+        <p:txBody>
+          <a:bodyPr/>
+          <a:p/>
+        </p:txBody>
       </p:sp>
       <p:sp>
         <p:nvSpPr>
@@ -5700,6 +5836,10 @@
             <a:prstDash val="solid"/>
           </a:ln>
         </p:spPr>
+        <p:txBody>
+          <a:bodyPr/>
+          <a:p/>
+        </p:txBody>
       </p:sp>
       <p:sp>
         <p:nvSpPr>
@@ -5725,6 +5865,10 @@
             <a:prstDash val="solid"/>
           </a:ln>
         </p:spPr>
+        <p:txBody>
+          <a:bodyPr/>
+          <a:p/>
+        </p:txBody>
       </p:sp>
       <p:pic>
         <p:nvPicPr>
@@ -5879,6 +6023,10 @@
             <a:prstDash val="solid"/>
           </a:ln>
         </p:spPr>
+        <p:txBody>
+          <a:bodyPr/>
+          <a:p/>
+        </p:txBody>
       </p:sp>
       <p:pic>
         <p:nvPicPr>
@@ -5943,6 +6091,30 @@
           </a:p>
         </p:txBody>
       </p:sp>
+      <p:pic>
+        <p:nvPicPr>
+          <p:cNvPr id="32" name="IE University logo" descr="IE University, School of Science &amp; Technology"/>
+          <p:cNvPicPr>
+            <a:picLocks noChangeAspect="1"/>
+          </p:cNvPicPr>
+          <p:nvPr/>
+        </p:nvPicPr>
+        <p:blipFill>
+          <a:blip r:embed="rId8"/>
+          <a:stretch>
+            <a:fillRect/>
+          </a:stretch>
+        </p:blipFill>
+        <p:spPr>
+          <a:xfrm>
+            <a:off x="8013607" y="92634"/>
+            <a:ext cx="764633" cy="262789"/>
+          </a:xfrm>
+          <a:prstGeom prst="rect">
+            <a:avLst/>
+          </a:prstGeom>
+        </p:spPr>
+      </p:pic>
     </p:spTree>
   </p:cSld>
   <p:clrMapOvr>
@@ -6008,7 +6180,7 @@
                 <a:ea typeface="Calibri" pitchFamily="34" charset="-122"/>
                 <a:cs typeface="Calibri" pitchFamily="34" charset="-120"/>
               </a:rPr>
-              <a:t>Master in Business Analytics and Big Data</a:t>
+              <a:t>Master in Business Analytics and Data Science</a:t>
             </a:r>
             <a:endParaRPr lang="en-US" sz="900" dirty="0"/>
           </a:p>
@@ -6047,7 +6219,7 @@
                 <a:ea typeface="Calibri" pitchFamily="34" charset="-122"/>
                 <a:cs typeface="Calibri" pitchFamily="34" charset="-120"/>
               </a:rPr>
-              <a:t>MLOps · MBABD-PT 2026–27 · Video 2 (Session 12) · AI Governance &amp; Regulatory Readiness · Juan Ramírez</a:t>
+              <a:t>MLOps · MBDS-PT2026F · Video 2 (Session 12) · AI Governance &amp; Regulatory Readiness · Juan Ramírez</a:t>
             </a:r>
             <a:endParaRPr lang="en-US" sz="800" dirty="0"/>
           </a:p>
@@ -6139,7 +6311,7 @@
         </p:nvSpPr>
         <p:spPr>
           <a:xfrm>
-            <a:off x="5806440" y="82296"/>
+            <a:off x="4950367" y="82296"/>
             <a:ext cx="2971800" cy="246888"/>
           </a:xfrm>
           <a:prstGeom prst="roundRect">
@@ -6157,6 +6329,10 @@
             <a:prstDash val="solid"/>
           </a:ln>
         </p:spPr>
+        <p:txBody>
+          <a:bodyPr/>
+          <a:p/>
+        </p:txBody>
       </p:sp>
       <p:sp>
         <p:nvSpPr>
@@ -6166,7 +6342,7 @@
         </p:nvSpPr>
         <p:spPr>
           <a:xfrm>
-            <a:off x="5806440" y="82296"/>
+            <a:off x="4950367" y="82296"/>
             <a:ext cx="2971800" cy="246888"/>
           </a:xfrm>
           <a:prstGeom prst="rect">
@@ -7237,6 +7413,10 @@
             <a:prstDash val="solid"/>
           </a:ln>
         </p:spPr>
+        <p:txBody>
+          <a:bodyPr/>
+          <a:p/>
+        </p:txBody>
       </p:sp>
       <p:sp>
         <p:nvSpPr>
@@ -7262,6 +7442,10 @@
             <a:prstDash val="solid"/>
           </a:ln>
         </p:spPr>
+        <p:txBody>
+          <a:bodyPr/>
+          <a:p/>
+        </p:txBody>
       </p:sp>
       <p:pic>
         <p:nvPicPr>
@@ -7391,6 +7575,10 @@
             <a:prstDash val="solid"/>
           </a:ln>
         </p:spPr>
+        <p:txBody>
+          <a:bodyPr/>
+          <a:p/>
+        </p:txBody>
       </p:sp>
       <p:sp>
         <p:nvSpPr>
@@ -7416,6 +7604,10 @@
             <a:prstDash val="solid"/>
           </a:ln>
         </p:spPr>
+        <p:txBody>
+          <a:bodyPr/>
+          <a:p/>
+        </p:txBody>
       </p:sp>
       <p:pic>
         <p:nvPicPr>
@@ -7519,6 +7711,30 @@
           </a:p>
         </p:txBody>
       </p:sp>
+      <p:pic>
+        <p:nvPicPr>
+          <p:cNvPr id="20" name="IE University logo" descr="IE University, School of Science &amp; Technology"/>
+          <p:cNvPicPr>
+            <a:picLocks noChangeAspect="1"/>
+          </p:cNvPicPr>
+          <p:nvPr/>
+        </p:nvPicPr>
+        <p:blipFill>
+          <a:blip r:embed="rId5"/>
+          <a:stretch>
+            <a:fillRect/>
+          </a:stretch>
+        </p:blipFill>
+        <p:spPr>
+          <a:xfrm>
+            <a:off x="8013607" y="92634"/>
+            <a:ext cx="764633" cy="262789"/>
+          </a:xfrm>
+          <a:prstGeom prst="rect">
+            <a:avLst/>
+          </a:prstGeom>
+        </p:spPr>
+      </p:pic>
     </p:spTree>
   </p:cSld>
   <p:clrMapOvr>
@@ -7584,7 +7800,7 @@
                 <a:ea typeface="Calibri" pitchFamily="34" charset="-122"/>
                 <a:cs typeface="Calibri" pitchFamily="34" charset="-120"/>
               </a:rPr>
-              <a:t>Master in Business Analytics and Big Data</a:t>
+              <a:t>Master in Business Analytics and Data Science</a:t>
             </a:r>
             <a:endParaRPr lang="en-US" sz="900" dirty="0"/>
           </a:p>
@@ -7623,7 +7839,7 @@
                 <a:ea typeface="Calibri" pitchFamily="34" charset="-122"/>
                 <a:cs typeface="Calibri" pitchFamily="34" charset="-120"/>
               </a:rPr>
-              <a:t>MLOps · MBABD-PT 2026–27 · Video 2 (Session 12) · AI Governance &amp; Regulatory Readiness · Juan Ramírez</a:t>
+              <a:t>MLOps · MBDS-PT2026F · Video 2 (Session 12) · AI Governance &amp; Regulatory Readiness · Juan Ramírez</a:t>
             </a:r>
             <a:endParaRPr lang="en-US" sz="800" dirty="0"/>
           </a:p>
@@ -7715,7 +7931,7 @@
         </p:nvSpPr>
         <p:spPr>
           <a:xfrm>
-            <a:off x="5806440" y="82296"/>
+            <a:off x="4950367" y="82296"/>
             <a:ext cx="2971800" cy="246888"/>
           </a:xfrm>
           <a:prstGeom prst="roundRect">
@@ -7733,6 +7949,10 @@
             <a:prstDash val="solid"/>
           </a:ln>
         </p:spPr>
+        <p:txBody>
+          <a:bodyPr/>
+          <a:p/>
+        </p:txBody>
       </p:sp>
       <p:sp>
         <p:nvSpPr>
@@ -7742,7 +7962,7 @@
         </p:nvSpPr>
         <p:spPr>
           <a:xfrm>
-            <a:off x="5806440" y="82296"/>
+            <a:off x="4950367" y="82296"/>
             <a:ext cx="2971800" cy="246888"/>
           </a:xfrm>
           <a:prstGeom prst="rect">
@@ -9155,6 +9375,10 @@
             <a:prstDash val="solid"/>
           </a:ln>
         </p:spPr>
+        <p:txBody>
+          <a:bodyPr/>
+          <a:p/>
+        </p:txBody>
       </p:sp>
       <p:pic>
         <p:nvPicPr>
@@ -9219,6 +9443,30 @@
           </a:p>
         </p:txBody>
       </p:sp>
+      <p:pic>
+        <p:nvPicPr>
+          <p:cNvPr id="15" name="IE University logo" descr="IE University, School of Science &amp; Technology"/>
+          <p:cNvPicPr>
+            <a:picLocks noChangeAspect="1"/>
+          </p:cNvPicPr>
+          <p:nvPr/>
+        </p:nvPicPr>
+        <p:blipFill>
+          <a:blip r:embed="rId4"/>
+          <a:stretch>
+            <a:fillRect/>
+          </a:stretch>
+        </p:blipFill>
+        <p:spPr>
+          <a:xfrm>
+            <a:off x="8013607" y="92634"/>
+            <a:ext cx="764633" cy="262789"/>
+          </a:xfrm>
+          <a:prstGeom prst="rect">
+            <a:avLst/>
+          </a:prstGeom>
+        </p:spPr>
+      </p:pic>
     </p:spTree>
   </p:cSld>
   <p:clrMapOvr>
@@ -9284,7 +9532,7 @@
                 <a:ea typeface="Calibri" pitchFamily="34" charset="-122"/>
                 <a:cs typeface="Calibri" pitchFamily="34" charset="-120"/>
               </a:rPr>
-              <a:t>Master in Business Analytics and Big Data</a:t>
+              <a:t>Master in Business Analytics and Data Science</a:t>
             </a:r>
             <a:endParaRPr lang="en-US" sz="900" dirty="0"/>
           </a:p>
@@ -9323,7 +9571,7 @@
                 <a:ea typeface="Calibri" pitchFamily="34" charset="-122"/>
                 <a:cs typeface="Calibri" pitchFamily="34" charset="-120"/>
               </a:rPr>
-              <a:t>MLOps · MBABD-PT 2026–27 · Video 2 (Session 12) · AI Governance &amp; Regulatory Readiness · Juan Ramírez</a:t>
+              <a:t>MLOps · MBDS-PT2026F · Video 2 (Session 12) · AI Governance &amp; Regulatory Readiness · Juan Ramírez</a:t>
             </a:r>
             <a:endParaRPr lang="en-US" sz="800" dirty="0"/>
           </a:p>
@@ -9415,7 +9663,7 @@
         </p:nvSpPr>
         <p:spPr>
           <a:xfrm>
-            <a:off x="5806440" y="82296"/>
+            <a:off x="4950367" y="82296"/>
             <a:ext cx="2971800" cy="246888"/>
           </a:xfrm>
           <a:prstGeom prst="roundRect">
@@ -9433,6 +9681,10 @@
             <a:prstDash val="solid"/>
           </a:ln>
         </p:spPr>
+        <p:txBody>
+          <a:bodyPr/>
+          <a:p/>
+        </p:txBody>
       </p:sp>
       <p:sp>
         <p:nvSpPr>
@@ -9442,7 +9694,7 @@
         </p:nvSpPr>
         <p:spPr>
           <a:xfrm>
-            <a:off x="5806440" y="82296"/>
+            <a:off x="4950367" y="82296"/>
             <a:ext cx="2971800" cy="246888"/>
           </a:xfrm>
           <a:prstGeom prst="rect">
@@ -9499,6 +9751,10 @@
             <a:prstDash val="solid"/>
           </a:ln>
         </p:spPr>
+        <p:txBody>
+          <a:bodyPr/>
+          <a:p/>
+        </p:txBody>
       </p:sp>
       <p:sp>
         <p:nvSpPr>
@@ -9604,6 +9860,10 @@
             <a:prstDash val="solid"/>
           </a:ln>
         </p:spPr>
+        <p:txBody>
+          <a:bodyPr/>
+          <a:p/>
+        </p:txBody>
       </p:sp>
       <p:sp>
         <p:nvSpPr>
@@ -9709,6 +9969,10 @@
             <a:prstDash val="solid"/>
           </a:ln>
         </p:spPr>
+        <p:txBody>
+          <a:bodyPr/>
+          <a:p/>
+        </p:txBody>
       </p:sp>
       <p:sp>
         <p:nvSpPr>
@@ -9814,6 +10078,10 @@
             <a:prstDash val="solid"/>
           </a:ln>
         </p:spPr>
+        <p:txBody>
+          <a:bodyPr/>
+          <a:p/>
+        </p:txBody>
       </p:sp>
       <p:sp>
         <p:nvSpPr>
@@ -9919,6 +10187,10 @@
             <a:prstDash val="solid"/>
           </a:ln>
         </p:spPr>
+        <p:txBody>
+          <a:bodyPr/>
+          <a:p/>
+        </p:txBody>
       </p:sp>
       <p:sp>
         <p:nvSpPr>
@@ -10024,6 +10296,10 @@
             <a:prstDash val="solid"/>
           </a:ln>
         </p:spPr>
+        <p:txBody>
+          <a:bodyPr/>
+          <a:p/>
+        </p:txBody>
       </p:sp>
       <p:sp>
         <p:nvSpPr>
@@ -10129,6 +10405,10 @@
             <a:prstDash val="solid"/>
           </a:ln>
         </p:spPr>
+        <p:txBody>
+          <a:bodyPr/>
+          <a:p/>
+        </p:txBody>
       </p:sp>
       <p:sp>
         <p:nvSpPr>
@@ -10234,6 +10514,10 @@
             <a:prstDash val="solid"/>
           </a:ln>
         </p:spPr>
+        <p:txBody>
+          <a:bodyPr/>
+          <a:p/>
+        </p:txBody>
       </p:sp>
       <p:pic>
         <p:nvPicPr>
@@ -10298,6 +10582,30 @@
           </a:p>
         </p:txBody>
       </p:sp>
+      <p:pic>
+        <p:nvPicPr>
+          <p:cNvPr id="33" name="IE University logo" descr="IE University, School of Science &amp; Technology"/>
+          <p:cNvPicPr>
+            <a:picLocks noChangeAspect="1"/>
+          </p:cNvPicPr>
+          <p:nvPr/>
+        </p:nvPicPr>
+        <p:blipFill>
+          <a:blip r:embed="rId4"/>
+          <a:stretch>
+            <a:fillRect/>
+          </a:stretch>
+        </p:blipFill>
+        <p:spPr>
+          <a:xfrm>
+            <a:off x="8013607" y="92634"/>
+            <a:ext cx="764633" cy="262789"/>
+          </a:xfrm>
+          <a:prstGeom prst="rect">
+            <a:avLst/>
+          </a:prstGeom>
+        </p:spPr>
+      </p:pic>
     </p:spTree>
   </p:cSld>
   <p:clrMapOvr>
@@ -10363,7 +10671,7 @@
                 <a:ea typeface="Calibri" pitchFamily="34" charset="-122"/>
                 <a:cs typeface="Calibri" pitchFamily="34" charset="-120"/>
               </a:rPr>
-              <a:t>Master in Business Analytics and Big Data</a:t>
+              <a:t>Master in Business Analytics and Data Science</a:t>
             </a:r>
             <a:endParaRPr lang="en-US" sz="900" dirty="0"/>
           </a:p>
@@ -10402,7 +10710,7 @@
                 <a:ea typeface="Calibri" pitchFamily="34" charset="-122"/>
                 <a:cs typeface="Calibri" pitchFamily="34" charset="-120"/>
               </a:rPr>
-              <a:t>MLOps · MBABD-PT 2026–27 · Video 2 (Session 12) · AI Governance &amp; Regulatory Readiness · Juan Ramírez</a:t>
+              <a:t>MLOps · MBDS-PT2026F · Video 2 (Session 12) · AI Governance &amp; Regulatory Readiness · Juan Ramírez</a:t>
             </a:r>
             <a:endParaRPr lang="en-US" sz="800" dirty="0"/>
           </a:p>
@@ -10494,7 +10802,7 @@
         </p:nvSpPr>
         <p:spPr>
           <a:xfrm>
-            <a:off x="5806440" y="82296"/>
+            <a:off x="4950367" y="82296"/>
             <a:ext cx="2971800" cy="246888"/>
           </a:xfrm>
           <a:prstGeom prst="roundRect">
@@ -10512,6 +10820,10 @@
             <a:prstDash val="solid"/>
           </a:ln>
         </p:spPr>
+        <p:txBody>
+          <a:bodyPr/>
+          <a:p/>
+        </p:txBody>
       </p:sp>
       <p:sp>
         <p:nvSpPr>
@@ -10521,7 +10833,7 @@
         </p:nvSpPr>
         <p:spPr>
           <a:xfrm>
-            <a:off x="5806440" y="82296"/>
+            <a:off x="4950367" y="82296"/>
             <a:ext cx="2971800" cy="246888"/>
           </a:xfrm>
           <a:prstGeom prst="rect">
@@ -11971,6 +12283,10 @@
             <a:prstDash val="solid"/>
           </a:ln>
         </p:spPr>
+        <p:txBody>
+          <a:bodyPr/>
+          <a:p/>
+        </p:txBody>
       </p:sp>
       <p:sp>
         <p:nvSpPr>
@@ -11996,6 +12312,10 @@
             <a:prstDash val="solid"/>
           </a:ln>
         </p:spPr>
+        <p:txBody>
+          <a:bodyPr/>
+          <a:p/>
+        </p:txBody>
       </p:sp>
       <p:pic>
         <p:nvPicPr>
@@ -12125,6 +12445,10 @@
             <a:prstDash val="solid"/>
           </a:ln>
         </p:spPr>
+        <p:txBody>
+          <a:bodyPr/>
+          <a:p/>
+        </p:txBody>
       </p:sp>
       <p:sp>
         <p:nvSpPr>
@@ -12150,6 +12474,10 @@
             <a:prstDash val="solid"/>
           </a:ln>
         </p:spPr>
+        <p:txBody>
+          <a:bodyPr/>
+          <a:p/>
+        </p:txBody>
       </p:sp>
       <p:pic>
         <p:nvPicPr>
@@ -12279,6 +12607,10 @@
             <a:prstDash val="solid"/>
           </a:ln>
         </p:spPr>
+        <p:txBody>
+          <a:bodyPr/>
+          <a:p/>
+        </p:txBody>
       </p:sp>
       <p:pic>
         <p:nvPicPr>
@@ -12343,6 +12675,30 @@
           </a:p>
         </p:txBody>
       </p:sp>
+      <p:pic>
+        <p:nvPicPr>
+          <p:cNvPr id="24" name="IE University logo" descr="IE University, School of Science &amp; Technology"/>
+          <p:cNvPicPr>
+            <a:picLocks noChangeAspect="1"/>
+          </p:cNvPicPr>
+          <p:nvPr/>
+        </p:nvPicPr>
+        <p:blipFill>
+          <a:blip r:embed="rId6"/>
+          <a:stretch>
+            <a:fillRect/>
+          </a:stretch>
+        </p:blipFill>
+        <p:spPr>
+          <a:xfrm>
+            <a:off x="8013607" y="92634"/>
+            <a:ext cx="764633" cy="262789"/>
+          </a:xfrm>
+          <a:prstGeom prst="rect">
+            <a:avLst/>
+          </a:prstGeom>
+        </p:spPr>
+      </p:pic>
     </p:spTree>
   </p:cSld>
   <p:clrMapOvr>
@@ -12408,7 +12764,7 @@
                 <a:ea typeface="Calibri" pitchFamily="34" charset="-122"/>
                 <a:cs typeface="Calibri" pitchFamily="34" charset="-120"/>
               </a:rPr>
-              <a:t>Master in Business Analytics and Big Data</a:t>
+              <a:t>Master in Business Analytics and Data Science</a:t>
             </a:r>
             <a:endParaRPr lang="en-US" sz="900" dirty="0"/>
           </a:p>
@@ -12447,7 +12803,7 @@
                 <a:ea typeface="Calibri" pitchFamily="34" charset="-122"/>
                 <a:cs typeface="Calibri" pitchFamily="34" charset="-120"/>
               </a:rPr>
-              <a:t>MLOps · MBABD-PT 2026–27 · Video 2 (Session 12) · AI Governance &amp; Regulatory Readiness · Juan Ramírez</a:t>
+              <a:t>MLOps · MBDS-PT2026F · Video 2 (Session 12) · AI Governance &amp; Regulatory Readiness · Juan Ramírez</a:t>
             </a:r>
             <a:endParaRPr lang="en-US" sz="800" dirty="0"/>
           </a:p>
@@ -12539,7 +12895,7 @@
         </p:nvSpPr>
         <p:spPr>
           <a:xfrm>
-            <a:off x="5806440" y="82296"/>
+            <a:off x="4950367" y="82296"/>
             <a:ext cx="2971800" cy="246888"/>
           </a:xfrm>
           <a:prstGeom prst="roundRect">
@@ -12557,6 +12913,10 @@
             <a:prstDash val="solid"/>
           </a:ln>
         </p:spPr>
+        <p:txBody>
+          <a:bodyPr/>
+          <a:p/>
+        </p:txBody>
       </p:sp>
       <p:sp>
         <p:nvSpPr>
@@ -12566,7 +12926,7 @@
         </p:nvSpPr>
         <p:spPr>
           <a:xfrm>
-            <a:off x="5806440" y="82296"/>
+            <a:off x="4950367" y="82296"/>
             <a:ext cx="2971800" cy="246888"/>
           </a:xfrm>
           <a:prstGeom prst="rect">
@@ -12621,6 +12981,10 @@
             <a:prstDash val="solid"/>
           </a:ln>
         </p:spPr>
+        <p:txBody>
+          <a:bodyPr/>
+          <a:p/>
+        </p:txBody>
       </p:sp>
       <p:pic>
         <p:nvPicPr>
@@ -12748,6 +13112,10 @@
             <a:prstDash val="solid"/>
           </a:ln>
         </p:spPr>
+        <p:txBody>
+          <a:bodyPr/>
+          <a:p/>
+        </p:txBody>
       </p:sp>
       <p:pic>
         <p:nvPicPr>
@@ -12875,6 +13243,10 @@
             <a:prstDash val="solid"/>
           </a:ln>
         </p:spPr>
+        <p:txBody>
+          <a:bodyPr/>
+          <a:p/>
+        </p:txBody>
       </p:sp>
       <p:pic>
         <p:nvPicPr>
@@ -13002,6 +13374,10 @@
             <a:prstDash val="solid"/>
           </a:ln>
         </p:spPr>
+        <p:txBody>
+          <a:bodyPr/>
+          <a:p/>
+        </p:txBody>
       </p:sp>
       <p:pic>
         <p:nvPicPr>
@@ -13129,6 +13505,10 @@
             <a:prstDash val="solid"/>
           </a:ln>
         </p:spPr>
+        <p:txBody>
+          <a:bodyPr/>
+          <a:p/>
+        </p:txBody>
       </p:sp>
       <p:pic>
         <p:nvPicPr>
@@ -13258,6 +13638,10 @@
             <a:prstDash val="solid"/>
           </a:ln>
         </p:spPr>
+        <p:txBody>
+          <a:bodyPr/>
+          <a:p/>
+        </p:txBody>
       </p:sp>
       <p:pic>
         <p:nvPicPr>
@@ -13322,6 +13706,30 @@
           </a:p>
         </p:txBody>
       </p:sp>
+      <p:pic>
+        <p:nvPicPr>
+          <p:cNvPr id="32" name="IE University logo" descr="IE University, School of Science &amp; Technology"/>
+          <p:cNvPicPr>
+            <a:picLocks noChangeAspect="1"/>
+          </p:cNvPicPr>
+          <p:nvPr/>
+        </p:nvPicPr>
+        <p:blipFill>
+          <a:blip r:embed="rId9"/>
+          <a:stretch>
+            <a:fillRect/>
+          </a:stretch>
+        </p:blipFill>
+        <p:spPr>
+          <a:xfrm>
+            <a:off x="8013607" y="92634"/>
+            <a:ext cx="764633" cy="262789"/>
+          </a:xfrm>
+          <a:prstGeom prst="rect">
+            <a:avLst/>
+          </a:prstGeom>
+        </p:spPr>
+      </p:pic>
     </p:spTree>
   </p:cSld>
   <p:clrMapOvr>
@@ -13387,7 +13795,7 @@
                 <a:ea typeface="Calibri" pitchFamily="34" charset="-122"/>
                 <a:cs typeface="Calibri" pitchFamily="34" charset="-120"/>
               </a:rPr>
-              <a:t>Master in Business Analytics and Big Data</a:t>
+              <a:t>Master in Business Analytics and Data Science</a:t>
             </a:r>
             <a:endParaRPr lang="en-US" sz="900" dirty="0"/>
           </a:p>
@@ -13426,7 +13834,7 @@
                 <a:ea typeface="Calibri" pitchFamily="34" charset="-122"/>
                 <a:cs typeface="Calibri" pitchFamily="34" charset="-120"/>
               </a:rPr>
-              <a:t>MLOps · MBABD-PT 2026–27 · Video 2 (Session 12) · AI Governance &amp; Regulatory Readiness · Juan Ramírez</a:t>
+              <a:t>MLOps · MBDS-PT2026F · Video 2 (Session 12) · AI Governance &amp; Regulatory Readiness · Juan Ramírez</a:t>
             </a:r>
             <a:endParaRPr lang="en-US" sz="800" dirty="0"/>
           </a:p>
@@ -13518,7 +13926,7 @@
         </p:nvSpPr>
         <p:spPr>
           <a:xfrm>
-            <a:off x="5806440" y="82296"/>
+            <a:off x="4950367" y="82296"/>
             <a:ext cx="2971800" cy="246888"/>
           </a:xfrm>
           <a:prstGeom prst="roundRect">
@@ -13536,6 +13944,10 @@
             <a:prstDash val="solid"/>
           </a:ln>
         </p:spPr>
+        <p:txBody>
+          <a:bodyPr/>
+          <a:p/>
+        </p:txBody>
       </p:sp>
       <p:sp>
         <p:nvSpPr>
@@ -13545,7 +13957,7 @@
         </p:nvSpPr>
         <p:spPr>
           <a:xfrm>
-            <a:off x="5806440" y="82296"/>
+            <a:off x="4950367" y="82296"/>
             <a:ext cx="2971800" cy="246888"/>
           </a:xfrm>
           <a:prstGeom prst="rect">
@@ -15480,6 +15892,10 @@
             <a:prstDash val="solid"/>
           </a:ln>
         </p:spPr>
+        <p:txBody>
+          <a:bodyPr/>
+          <a:p/>
+        </p:txBody>
       </p:sp>
       <p:pic>
         <p:nvPicPr>
@@ -15544,6 +15960,30 @@
           </a:p>
         </p:txBody>
       </p:sp>
+      <p:pic>
+        <p:nvPicPr>
+          <p:cNvPr id="19" name="IE University logo" descr="IE University, School of Science &amp; Technology"/>
+          <p:cNvPicPr>
+            <a:picLocks noChangeAspect="1"/>
+          </p:cNvPicPr>
+          <p:nvPr/>
+        </p:nvPicPr>
+        <p:blipFill>
+          <a:blip r:embed="rId4"/>
+          <a:stretch>
+            <a:fillRect/>
+          </a:stretch>
+        </p:blipFill>
+        <p:spPr>
+          <a:xfrm>
+            <a:off x="8013607" y="92634"/>
+            <a:ext cx="764633" cy="262789"/>
+          </a:xfrm>
+          <a:prstGeom prst="rect">
+            <a:avLst/>
+          </a:prstGeom>
+        </p:spPr>
+      </p:pic>
     </p:spTree>
   </p:cSld>
   <p:clrMapOvr>
@@ -15609,7 +16049,7 @@
                 <a:ea typeface="Calibri" pitchFamily="34" charset="-122"/>
                 <a:cs typeface="Calibri" pitchFamily="34" charset="-120"/>
               </a:rPr>
-              <a:t>Master in Business Analytics and Big Data</a:t>
+              <a:t>Master in Business Analytics and Data Science</a:t>
             </a:r>
             <a:endParaRPr lang="en-US" sz="900" dirty="0"/>
           </a:p>
@@ -15648,7 +16088,7 @@
                 <a:ea typeface="Calibri" pitchFamily="34" charset="-122"/>
                 <a:cs typeface="Calibri" pitchFamily="34" charset="-120"/>
               </a:rPr>
-              <a:t>MLOps · MBABD-PT 2026–27 · Video 2 (Session 12) · AI Governance &amp; Regulatory Readiness · Juan Ramírez</a:t>
+              <a:t>MLOps · MBDS-PT2026F · Video 2 (Session 12) · AI Governance &amp; Regulatory Readiness · Juan Ramírez</a:t>
             </a:r>
             <a:endParaRPr lang="en-US" sz="800" dirty="0"/>
           </a:p>
@@ -15740,7 +16180,7 @@
         </p:nvSpPr>
         <p:spPr>
           <a:xfrm>
-            <a:off x="5806440" y="82296"/>
+            <a:off x="4950367" y="82296"/>
             <a:ext cx="2971800" cy="246888"/>
           </a:xfrm>
           <a:prstGeom prst="roundRect">
@@ -15758,6 +16198,10 @@
             <a:prstDash val="solid"/>
           </a:ln>
         </p:spPr>
+        <p:txBody>
+          <a:bodyPr/>
+          <a:p/>
+        </p:txBody>
       </p:sp>
       <p:sp>
         <p:nvSpPr>
@@ -15767,7 +16211,7 @@
         </p:nvSpPr>
         <p:spPr>
           <a:xfrm>
-            <a:off x="5806440" y="82296"/>
+            <a:off x="4950367" y="82296"/>
             <a:ext cx="2971800" cy="246888"/>
           </a:xfrm>
           <a:prstGeom prst="rect">
@@ -15824,6 +16268,10 @@
             <a:prstDash val="solid"/>
           </a:ln>
         </p:spPr>
+        <p:txBody>
+          <a:bodyPr/>
+          <a:p/>
+        </p:txBody>
       </p:sp>
       <p:sp>
         <p:nvSpPr>
@@ -15926,6 +16374,10 @@
             <a:tailEnd type="triangle"/>
           </a:ln>
         </p:spPr>
+        <p:txBody>
+          <a:bodyPr/>
+          <a:p/>
+        </p:txBody>
       </p:sp>
       <p:sp>
         <p:nvSpPr>
@@ -15953,6 +16405,10 @@
             <a:prstDash val="solid"/>
           </a:ln>
         </p:spPr>
+        <p:txBody>
+          <a:bodyPr/>
+          <a:p/>
+        </p:txBody>
       </p:sp>
       <p:sp>
         <p:nvSpPr>
@@ -16055,6 +16511,10 @@
             <a:tailEnd type="triangle"/>
           </a:ln>
         </p:spPr>
+        <p:txBody>
+          <a:bodyPr/>
+          <a:p/>
+        </p:txBody>
       </p:sp>
       <p:sp>
         <p:nvSpPr>
@@ -16082,6 +16542,10 @@
             <a:prstDash val="solid"/>
           </a:ln>
         </p:spPr>
+        <p:txBody>
+          <a:bodyPr/>
+          <a:p/>
+        </p:txBody>
       </p:sp>
       <p:sp>
         <p:nvSpPr>
@@ -16184,6 +16648,10 @@
             <a:tailEnd type="triangle"/>
           </a:ln>
         </p:spPr>
+        <p:txBody>
+          <a:bodyPr/>
+          <a:p/>
+        </p:txBody>
       </p:sp>
       <p:sp>
         <p:nvSpPr>
@@ -16211,6 +16679,10 @@
             <a:prstDash val="solid"/>
           </a:ln>
         </p:spPr>
+        <p:txBody>
+          <a:bodyPr/>
+          <a:p/>
+        </p:txBody>
       </p:sp>
       <p:sp>
         <p:nvSpPr>
@@ -16313,6 +16785,10 @@
             <a:tailEnd type="triangle"/>
           </a:ln>
         </p:spPr>
+        <p:txBody>
+          <a:bodyPr/>
+          <a:p/>
+        </p:txBody>
       </p:sp>
       <p:sp>
         <p:nvSpPr>
@@ -16340,6 +16816,10 @@
             <a:prstDash val="solid"/>
           </a:ln>
         </p:spPr>
+        <p:txBody>
+          <a:bodyPr/>
+          <a:p/>
+        </p:txBody>
       </p:sp>
       <p:sp>
         <p:nvSpPr>
@@ -16442,6 +16922,10 @@
             <a:tailEnd type="triangle"/>
           </a:ln>
         </p:spPr>
+        <p:txBody>
+          <a:bodyPr/>
+          <a:p/>
+        </p:txBody>
       </p:sp>
       <p:sp>
         <p:nvSpPr>
@@ -16469,6 +16953,10 @@
             <a:prstDash val="solid"/>
           </a:ln>
         </p:spPr>
+        <p:txBody>
+          <a:bodyPr/>
+          <a:p/>
+        </p:txBody>
       </p:sp>
       <p:sp>
         <p:nvSpPr>
@@ -16571,6 +17059,10 @@
             <a:tailEnd type="triangle"/>
           </a:ln>
         </p:spPr>
+        <p:txBody>
+          <a:bodyPr/>
+          <a:p/>
+        </p:txBody>
       </p:sp>
       <p:sp>
         <p:nvSpPr>
@@ -16598,6 +17090,10 @@
             <a:prstDash val="solid"/>
           </a:ln>
         </p:spPr>
+        <p:txBody>
+          <a:bodyPr/>
+          <a:p/>
+        </p:txBody>
       </p:sp>
       <p:sp>
         <p:nvSpPr>
@@ -16703,6 +17199,10 @@
             <a:prstDash val="solid"/>
           </a:ln>
         </p:spPr>
+        <p:txBody>
+          <a:bodyPr/>
+          <a:p/>
+        </p:txBody>
       </p:sp>
       <p:sp>
         <p:nvSpPr>
@@ -16769,6 +17269,10 @@
             <a:prstDash val="solid"/>
           </a:ln>
         </p:spPr>
+        <p:txBody>
+          <a:bodyPr/>
+          <a:p/>
+        </p:txBody>
       </p:sp>
       <p:pic>
         <p:nvPicPr>
@@ -16833,6 +17337,30 @@
           </a:p>
         </p:txBody>
       </p:sp>
+      <p:pic>
+        <p:nvPicPr>
+          <p:cNvPr id="41" name="IE University logo" descr="IE University, School of Science &amp; Technology"/>
+          <p:cNvPicPr>
+            <a:picLocks noChangeAspect="1"/>
+          </p:cNvPicPr>
+          <p:nvPr/>
+        </p:nvPicPr>
+        <p:blipFill>
+          <a:blip r:embed="rId4"/>
+          <a:stretch>
+            <a:fillRect/>
+          </a:stretch>
+        </p:blipFill>
+        <p:spPr>
+          <a:xfrm>
+            <a:off x="8013607" y="92634"/>
+            <a:ext cx="764633" cy="262789"/>
+          </a:xfrm>
+          <a:prstGeom prst="rect">
+            <a:avLst/>
+          </a:prstGeom>
+        </p:spPr>
+      </p:pic>
     </p:spTree>
   </p:cSld>
   <p:clrMapOvr>
@@ -16898,7 +17426,7 @@
                 <a:ea typeface="Calibri" pitchFamily="34" charset="-122"/>
                 <a:cs typeface="Calibri" pitchFamily="34" charset="-120"/>
               </a:rPr>
-              <a:t>Master in Business Analytics and Big Data</a:t>
+              <a:t>Master in Business Analytics and Data Science</a:t>
             </a:r>
             <a:endParaRPr lang="en-US" sz="900" dirty="0"/>
           </a:p>
@@ -16937,7 +17465,7 @@
                 <a:ea typeface="Calibri" pitchFamily="34" charset="-122"/>
                 <a:cs typeface="Calibri" pitchFamily="34" charset="-120"/>
               </a:rPr>
-              <a:t>MLOps · MBABD-PT 2026–27 · Video 2 (Session 12) · AI Governance &amp; Regulatory Readiness · Juan Ramírez</a:t>
+              <a:t>MLOps · MBDS-PT2026F · Video 2 (Session 12) · AI Governance &amp; Regulatory Readiness · Juan Ramírez</a:t>
             </a:r>
             <a:endParaRPr lang="en-US" sz="800" dirty="0"/>
           </a:p>
@@ -17029,7 +17557,7 @@
         </p:nvSpPr>
         <p:spPr>
           <a:xfrm>
-            <a:off x="5806440" y="82296"/>
+            <a:off x="4950367" y="82296"/>
             <a:ext cx="2971800" cy="246888"/>
           </a:xfrm>
           <a:prstGeom prst="roundRect">
@@ -17047,6 +17575,10 @@
             <a:prstDash val="solid"/>
           </a:ln>
         </p:spPr>
+        <p:txBody>
+          <a:bodyPr/>
+          <a:p/>
+        </p:txBody>
       </p:sp>
       <p:sp>
         <p:nvSpPr>
@@ -17056,7 +17588,7 @@
         </p:nvSpPr>
         <p:spPr>
           <a:xfrm>
-            <a:off x="5806440" y="82296"/>
+            <a:off x="4950367" y="82296"/>
             <a:ext cx="2971800" cy="246888"/>
           </a:xfrm>
           <a:prstGeom prst="rect">
@@ -17111,6 +17643,10 @@
             <a:prstDash val="solid"/>
           </a:ln>
         </p:spPr>
+        <p:txBody>
+          <a:bodyPr/>
+          <a:p/>
+        </p:txBody>
       </p:sp>
       <p:sp>
         <p:nvSpPr>
@@ -17253,6 +17789,10 @@
             <a:prstDash val="solid"/>
           </a:ln>
         </p:spPr>
+        <p:txBody>
+          <a:bodyPr/>
+          <a:p/>
+        </p:txBody>
       </p:sp>
       <p:sp>
         <p:nvSpPr>
@@ -17395,6 +17935,10 @@
             <a:prstDash val="solid"/>
           </a:ln>
         </p:spPr>
+        <p:txBody>
+          <a:bodyPr/>
+          <a:p/>
+        </p:txBody>
       </p:sp>
       <p:sp>
         <p:nvSpPr>
@@ -17513,6 +18057,30 @@
           </a:p>
         </p:txBody>
       </p:sp>
+      <p:pic>
+        <p:nvPicPr>
+          <p:cNvPr id="21" name="IE University logo" descr="IE University, School of Science &amp; Technology"/>
+          <p:cNvPicPr>
+            <a:picLocks noChangeAspect="1"/>
+          </p:cNvPicPr>
+          <p:nvPr/>
+        </p:nvPicPr>
+        <p:blipFill>
+          <a:blip r:embed="rId3"/>
+          <a:stretch>
+            <a:fillRect/>
+          </a:stretch>
+        </p:blipFill>
+        <p:spPr>
+          <a:xfrm>
+            <a:off x="8013607" y="92634"/>
+            <a:ext cx="764633" cy="262789"/>
+          </a:xfrm>
+          <a:prstGeom prst="rect">
+            <a:avLst/>
+          </a:prstGeom>
+        </p:spPr>
+      </p:pic>
     </p:spTree>
   </p:cSld>
   <p:clrMapOvr>
@@ -17578,7 +18146,7 @@
                 <a:ea typeface="Calibri" pitchFamily="34" charset="-122"/>
                 <a:cs typeface="Calibri" pitchFamily="34" charset="-120"/>
               </a:rPr>
-              <a:t>Master in Business Analytics and Big Data</a:t>
+              <a:t>Master in Business Analytics and Data Science</a:t>
             </a:r>
             <a:endParaRPr lang="en-US" sz="900" dirty="0"/>
           </a:p>
@@ -17617,7 +18185,7 @@
                 <a:ea typeface="Calibri" pitchFamily="34" charset="-122"/>
                 <a:cs typeface="Calibri" pitchFamily="34" charset="-120"/>
               </a:rPr>
-              <a:t>MLOps · MBABD-PT 2026–27 · Video 2 (Session 12) · AI Governance &amp; Regulatory Readiness · Juan Ramírez</a:t>
+              <a:t>MLOps · MBDS-PT2026F · Video 2 (Session 12) · AI Governance &amp; Regulatory Readiness · Juan Ramírez</a:t>
             </a:r>
             <a:endParaRPr lang="en-US" sz="800" dirty="0"/>
           </a:p>
@@ -20129,6 +20697,10 @@
             <a:prstDash val="solid"/>
           </a:ln>
         </p:spPr>
+        <p:txBody>
+          <a:bodyPr/>
+          <a:p/>
+        </p:txBody>
       </p:sp>
       <p:sp>
         <p:nvSpPr>
@@ -20154,6 +20726,10 @@
             <a:prstDash val="solid"/>
           </a:ln>
         </p:spPr>
+        <p:txBody>
+          <a:bodyPr/>
+          <a:p/>
+        </p:txBody>
       </p:sp>
       <p:pic>
         <p:nvPicPr>
@@ -20329,6 +20905,10 @@
             <a:prstDash val="solid"/>
           </a:ln>
         </p:spPr>
+        <p:txBody>
+          <a:bodyPr/>
+          <a:p/>
+        </p:txBody>
       </p:sp>
       <p:sp>
         <p:nvSpPr>
@@ -20354,6 +20934,10 @@
             <a:prstDash val="solid"/>
           </a:ln>
         </p:spPr>
+        <p:txBody>
+          <a:bodyPr/>
+          <a:p/>
+        </p:txBody>
       </p:sp>
       <p:pic>
         <p:nvPicPr>
@@ -20483,6 +21067,10 @@
             <a:prstDash val="solid"/>
           </a:ln>
         </p:spPr>
+        <p:txBody>
+          <a:bodyPr/>
+          <a:p/>
+        </p:txBody>
       </p:sp>
       <p:pic>
         <p:nvPicPr>
@@ -20547,6 +21135,30 @@
           </a:p>
         </p:txBody>
       </p:sp>
+      <p:pic>
+        <p:nvPicPr>
+          <p:cNvPr id="21" name="IE University logo" descr="IE University, School of Science &amp; Technology"/>
+          <p:cNvPicPr>
+            <a:picLocks noChangeAspect="1"/>
+          </p:cNvPicPr>
+          <p:nvPr/>
+        </p:nvPicPr>
+        <p:blipFill>
+          <a:blip r:embed="rId6"/>
+          <a:stretch>
+            <a:fillRect/>
+          </a:stretch>
+        </p:blipFill>
+        <p:spPr>
+          <a:xfrm>
+            <a:off x="8013607" y="92634"/>
+            <a:ext cx="764633" cy="262789"/>
+          </a:xfrm>
+          <a:prstGeom prst="rect">
+            <a:avLst/>
+          </a:prstGeom>
+        </p:spPr>
+      </p:pic>
     </p:spTree>
   </p:cSld>
   <p:clrMapOvr>
@@ -20612,7 +21224,7 @@
                 <a:ea typeface="Calibri" pitchFamily="34" charset="-122"/>
                 <a:cs typeface="Calibri" pitchFamily="34" charset="-120"/>
               </a:rPr>
-              <a:t>Master in Business Analytics and Big Data</a:t>
+              <a:t>Master in Business Analytics and Data Science</a:t>
             </a:r>
             <a:endParaRPr lang="en-US" sz="900" dirty="0"/>
           </a:p>
@@ -20651,7 +21263,7 @@
                 <a:ea typeface="Calibri" pitchFamily="34" charset="-122"/>
                 <a:cs typeface="Calibri" pitchFamily="34" charset="-120"/>
               </a:rPr>
-              <a:t>MLOps · MBABD-PT 2026–27 · Video 2 (Session 12) · AI Governance &amp; Regulatory Readiness · Juan Ramírez</a:t>
+              <a:t>MLOps · MBDS-PT2026F · Video 2 (Session 12) · AI Governance &amp; Regulatory Readiness · Juan Ramírez</a:t>
             </a:r>
             <a:endParaRPr lang="en-US" sz="800" dirty="0"/>
           </a:p>
@@ -20743,7 +21355,7 @@
         </p:nvSpPr>
         <p:spPr>
           <a:xfrm>
-            <a:off x="5806440" y="82296"/>
+            <a:off x="4950367" y="82296"/>
             <a:ext cx="2971800" cy="246888"/>
           </a:xfrm>
           <a:prstGeom prst="roundRect">
@@ -20761,6 +21373,10 @@
             <a:prstDash val="solid"/>
           </a:ln>
         </p:spPr>
+        <p:txBody>
+          <a:bodyPr/>
+          <a:p/>
+        </p:txBody>
       </p:sp>
       <p:sp>
         <p:nvSpPr>
@@ -20770,7 +21386,7 @@
         </p:nvSpPr>
         <p:spPr>
           <a:xfrm>
-            <a:off x="5806440" y="82296"/>
+            <a:off x="4950367" y="82296"/>
             <a:ext cx="2971800" cy="246888"/>
           </a:xfrm>
           <a:prstGeom prst="rect">
@@ -20827,6 +21443,10 @@
             <a:prstDash val="solid"/>
           </a:ln>
         </p:spPr>
+        <p:txBody>
+          <a:bodyPr/>
+          <a:p/>
+        </p:txBody>
       </p:sp>
       <p:sp>
         <p:nvSpPr>
@@ -20852,6 +21472,10 @@
             <a:prstDash val="solid"/>
           </a:ln>
         </p:spPr>
+        <p:txBody>
+          <a:bodyPr/>
+          <a:p/>
+        </p:txBody>
       </p:sp>
       <p:pic>
         <p:nvPicPr>
@@ -21048,6 +21672,10 @@
             <a:prstDash val="solid"/>
           </a:ln>
         </p:spPr>
+        <p:txBody>
+          <a:bodyPr/>
+          <a:p/>
+        </p:txBody>
       </p:sp>
       <p:sp>
         <p:nvSpPr>
@@ -21073,6 +21701,10 @@
             <a:prstDash val="solid"/>
           </a:ln>
         </p:spPr>
+        <p:txBody>
+          <a:bodyPr/>
+          <a:p/>
+        </p:txBody>
       </p:sp>
       <p:pic>
         <p:nvPicPr>
@@ -21269,6 +21901,10 @@
             <a:prstDash val="solid"/>
           </a:ln>
         </p:spPr>
+        <p:txBody>
+          <a:bodyPr/>
+          <a:p/>
+        </p:txBody>
       </p:sp>
       <p:sp>
         <p:nvSpPr>
@@ -21309,6 +21945,30 @@
           </a:p>
         </p:txBody>
       </p:sp>
+      <p:pic>
+        <p:nvPicPr>
+          <p:cNvPr id="21" name="IE University logo" descr="IE University, School of Science &amp; Technology"/>
+          <p:cNvPicPr>
+            <a:picLocks noChangeAspect="1"/>
+          </p:cNvPicPr>
+          <p:nvPr/>
+        </p:nvPicPr>
+        <p:blipFill>
+          <a:blip r:embed="rId5"/>
+          <a:stretch>
+            <a:fillRect/>
+          </a:stretch>
+        </p:blipFill>
+        <p:spPr>
+          <a:xfrm>
+            <a:off x="8013607" y="92634"/>
+            <a:ext cx="764633" cy="262789"/>
+          </a:xfrm>
+          <a:prstGeom prst="rect">
+            <a:avLst/>
+          </a:prstGeom>
+        </p:spPr>
+      </p:pic>
     </p:spTree>
   </p:cSld>
   <p:clrMapOvr>
@@ -21374,7 +22034,7 @@
                 <a:ea typeface="Calibri" pitchFamily="34" charset="-122"/>
                 <a:cs typeface="Calibri" pitchFamily="34" charset="-120"/>
               </a:rPr>
-              <a:t>Master in Business Analytics and Big Data</a:t>
+              <a:t>Master in Business Analytics and Data Science</a:t>
             </a:r>
             <a:endParaRPr lang="en-US" sz="900" dirty="0"/>
           </a:p>
@@ -21413,7 +22073,7 @@
                 <a:ea typeface="Calibri" pitchFamily="34" charset="-122"/>
                 <a:cs typeface="Calibri" pitchFamily="34" charset="-120"/>
               </a:rPr>
-              <a:t>MLOps · MBABD-PT 2026–27 · Video 2 (Session 12) · AI Governance &amp; Regulatory Readiness · Juan Ramírez</a:t>
+              <a:t>MLOps · MBDS-PT2026F · Video 2 (Session 12) · AI Governance &amp; Regulatory Readiness · Juan Ramírez</a:t>
             </a:r>
             <a:endParaRPr lang="en-US" sz="800" dirty="0"/>
           </a:p>
@@ -21505,7 +22165,7 @@
         </p:nvSpPr>
         <p:spPr>
           <a:xfrm>
-            <a:off x="5806440" y="82296"/>
+            <a:off x="4950367" y="82296"/>
             <a:ext cx="2971800" cy="246888"/>
           </a:xfrm>
           <a:prstGeom prst="roundRect">
@@ -21523,6 +22183,10 @@
             <a:prstDash val="solid"/>
           </a:ln>
         </p:spPr>
+        <p:txBody>
+          <a:bodyPr/>
+          <a:p/>
+        </p:txBody>
       </p:sp>
       <p:sp>
         <p:nvSpPr>
@@ -21532,7 +22196,7 @@
         </p:nvSpPr>
         <p:spPr>
           <a:xfrm>
-            <a:off x="5806440" y="82296"/>
+            <a:off x="4950367" y="82296"/>
             <a:ext cx="2971800" cy="246888"/>
           </a:xfrm>
           <a:prstGeom prst="rect">
@@ -21589,6 +22253,10 @@
             <a:prstDash val="solid"/>
           </a:ln>
         </p:spPr>
+        <p:txBody>
+          <a:bodyPr/>
+          <a:p/>
+        </p:txBody>
       </p:sp>
       <p:sp>
         <p:nvSpPr>
@@ -21614,6 +22282,10 @@
             <a:prstDash val="solid"/>
           </a:ln>
         </p:spPr>
+        <p:txBody>
+          <a:bodyPr/>
+          <a:p/>
+        </p:txBody>
       </p:sp>
       <p:pic>
         <p:nvPicPr>
@@ -21831,6 +22503,10 @@
             <a:prstDash val="solid"/>
           </a:ln>
         </p:spPr>
+        <p:txBody>
+          <a:bodyPr/>
+          <a:p/>
+        </p:txBody>
       </p:sp>
       <p:sp>
         <p:nvSpPr>
@@ -21856,6 +22532,10 @@
             <a:prstDash val="solid"/>
           </a:ln>
         </p:spPr>
+        <p:txBody>
+          <a:bodyPr/>
+          <a:p/>
+        </p:txBody>
       </p:sp>
       <p:pic>
         <p:nvPicPr>
@@ -22094,6 +22774,10 @@
             <a:prstDash val="solid"/>
           </a:ln>
         </p:spPr>
+        <p:txBody>
+          <a:bodyPr/>
+          <a:p/>
+        </p:txBody>
       </p:sp>
       <p:pic>
         <p:nvPicPr>
@@ -22158,6 +22842,30 @@
           </a:p>
         </p:txBody>
       </p:sp>
+      <p:pic>
+        <p:nvPicPr>
+          <p:cNvPr id="22" name="IE University logo" descr="IE University, School of Science &amp; Technology"/>
+          <p:cNvPicPr>
+            <a:picLocks noChangeAspect="1"/>
+          </p:cNvPicPr>
+          <p:nvPr/>
+        </p:nvPicPr>
+        <p:blipFill>
+          <a:blip r:embed="rId6"/>
+          <a:stretch>
+            <a:fillRect/>
+          </a:stretch>
+        </p:blipFill>
+        <p:spPr>
+          <a:xfrm>
+            <a:off x="8013607" y="92634"/>
+            <a:ext cx="764633" cy="262789"/>
+          </a:xfrm>
+          <a:prstGeom prst="rect">
+            <a:avLst/>
+          </a:prstGeom>
+        </p:spPr>
+      </p:pic>
     </p:spTree>
   </p:cSld>
   <p:clrMapOvr>
@@ -22223,7 +22931,7 @@
                 <a:ea typeface="Calibri" pitchFamily="34" charset="-122"/>
                 <a:cs typeface="Calibri" pitchFamily="34" charset="-120"/>
               </a:rPr>
-              <a:t>Master in Business Analytics and Big Data</a:t>
+              <a:t>Master in Business Analytics and Data Science</a:t>
             </a:r>
             <a:endParaRPr lang="en-US" sz="900" dirty="0"/>
           </a:p>
@@ -22262,7 +22970,7 @@
                 <a:ea typeface="Calibri" pitchFamily="34" charset="-122"/>
                 <a:cs typeface="Calibri" pitchFamily="34" charset="-120"/>
               </a:rPr>
-              <a:t>MLOps · MBABD-PT 2026–27 · Video 2 (Session 12) · AI Governance &amp; Regulatory Readiness · Juan Ramírez</a:t>
+              <a:t>MLOps · MBDS-PT2026F · Video 2 (Session 12) · AI Governance &amp; Regulatory Readiness · Juan Ramírez</a:t>
             </a:r>
             <a:endParaRPr lang="en-US" sz="800" dirty="0"/>
           </a:p>
@@ -22354,7 +23062,7 @@
         </p:nvSpPr>
         <p:spPr>
           <a:xfrm>
-            <a:off x="5806440" y="82296"/>
+            <a:off x="4950367" y="82296"/>
             <a:ext cx="2971800" cy="246888"/>
           </a:xfrm>
           <a:prstGeom prst="roundRect">
@@ -22372,6 +23080,10 @@
             <a:prstDash val="solid"/>
           </a:ln>
         </p:spPr>
+        <p:txBody>
+          <a:bodyPr/>
+          <a:p/>
+        </p:txBody>
       </p:sp>
       <p:sp>
         <p:nvSpPr>
@@ -22381,7 +23093,7 @@
         </p:nvSpPr>
         <p:spPr>
           <a:xfrm>
-            <a:off x="5806440" y="82296"/>
+            <a:off x="4950367" y="82296"/>
             <a:ext cx="2971800" cy="246888"/>
           </a:xfrm>
           <a:prstGeom prst="rect">
@@ -22438,6 +23150,10 @@
             <a:prstDash val="solid"/>
           </a:ln>
         </p:spPr>
+        <p:txBody>
+          <a:bodyPr/>
+          <a:p/>
+        </p:txBody>
       </p:sp>
       <p:sp>
         <p:nvSpPr>
@@ -22463,6 +23179,10 @@
             <a:prstDash val="solid"/>
           </a:ln>
         </p:spPr>
+        <p:txBody>
+          <a:bodyPr/>
+          <a:p/>
+        </p:txBody>
       </p:sp>
       <p:pic>
         <p:nvPicPr>
@@ -22638,6 +23358,10 @@
             <a:prstDash val="solid"/>
           </a:ln>
         </p:spPr>
+        <p:txBody>
+          <a:bodyPr/>
+          <a:p/>
+        </p:txBody>
       </p:sp>
       <p:sp>
         <p:nvSpPr>
@@ -22663,6 +23387,10 @@
             <a:prstDash val="solid"/>
           </a:ln>
         </p:spPr>
+        <p:txBody>
+          <a:bodyPr/>
+          <a:p/>
+        </p:txBody>
       </p:sp>
       <p:pic>
         <p:nvPicPr>
@@ -22838,6 +23566,10 @@
             <a:prstDash val="solid"/>
           </a:ln>
         </p:spPr>
+        <p:txBody>
+          <a:bodyPr/>
+          <a:p/>
+        </p:txBody>
       </p:sp>
       <p:sp>
         <p:nvSpPr>
@@ -22917,6 +23649,30 @@
           </a:p>
         </p:txBody>
       </p:sp>
+      <p:pic>
+        <p:nvPicPr>
+          <p:cNvPr id="22" name="IE University logo" descr="IE University, School of Science &amp; Technology"/>
+          <p:cNvPicPr>
+            <a:picLocks noChangeAspect="1"/>
+          </p:cNvPicPr>
+          <p:nvPr/>
+        </p:nvPicPr>
+        <p:blipFill>
+          <a:blip r:embed="rId5"/>
+          <a:stretch>
+            <a:fillRect/>
+          </a:stretch>
+        </p:blipFill>
+        <p:spPr>
+          <a:xfrm>
+            <a:off x="8013607" y="92634"/>
+            <a:ext cx="764633" cy="262789"/>
+          </a:xfrm>
+          <a:prstGeom prst="rect">
+            <a:avLst/>
+          </a:prstGeom>
+        </p:spPr>
+      </p:pic>
     </p:spTree>
   </p:cSld>
   <p:clrMapOvr>
@@ -22982,7 +23738,7 @@
                 <a:ea typeface="Calibri" pitchFamily="34" charset="-122"/>
                 <a:cs typeface="Calibri" pitchFamily="34" charset="-120"/>
               </a:rPr>
-              <a:t>Master in Business Analytics and Big Data</a:t>
+              <a:t>Master in Business Analytics and Data Science</a:t>
             </a:r>
             <a:endParaRPr lang="en-US" sz="900" dirty="0"/>
           </a:p>
@@ -23021,7 +23777,7 @@
                 <a:ea typeface="Calibri" pitchFamily="34" charset="-122"/>
                 <a:cs typeface="Calibri" pitchFamily="34" charset="-120"/>
               </a:rPr>
-              <a:t>MLOps · MBABD-PT 2026–27 · Video 2 (Session 12) · AI Governance &amp; Regulatory Readiness · Juan Ramírez</a:t>
+              <a:t>MLOps · MBDS-PT2026F · Video 2 (Session 12) · AI Governance &amp; Regulatory Readiness · Juan Ramírez</a:t>
             </a:r>
             <a:endParaRPr lang="en-US" sz="800" dirty="0"/>
           </a:p>
@@ -23113,7 +23869,7 @@
         </p:nvSpPr>
         <p:spPr>
           <a:xfrm>
-            <a:off x="5806440" y="82296"/>
+            <a:off x="4950367" y="82296"/>
             <a:ext cx="2971800" cy="246888"/>
           </a:xfrm>
           <a:prstGeom prst="roundRect">
@@ -23131,6 +23887,10 @@
             <a:prstDash val="solid"/>
           </a:ln>
         </p:spPr>
+        <p:txBody>
+          <a:bodyPr/>
+          <a:p/>
+        </p:txBody>
       </p:sp>
       <p:sp>
         <p:nvSpPr>
@@ -23140,7 +23900,7 @@
         </p:nvSpPr>
         <p:spPr>
           <a:xfrm>
-            <a:off x="5806440" y="82296"/>
+            <a:off x="4950367" y="82296"/>
             <a:ext cx="2971800" cy="246888"/>
           </a:xfrm>
           <a:prstGeom prst="rect">
@@ -24419,6 +25179,10 @@
             <a:prstDash val="solid"/>
           </a:ln>
         </p:spPr>
+        <p:txBody>
+          <a:bodyPr/>
+          <a:p/>
+        </p:txBody>
       </p:sp>
       <p:sp>
         <p:nvSpPr>
@@ -24593,6 +25357,10 @@
             <a:prstDash val="solid"/>
           </a:ln>
         </p:spPr>
+        <p:txBody>
+          <a:bodyPr/>
+          <a:p/>
+        </p:txBody>
       </p:sp>
       <p:pic>
         <p:nvPicPr>
@@ -24657,6 +25425,30 @@
           </a:p>
         </p:txBody>
       </p:sp>
+      <p:pic>
+        <p:nvPicPr>
+          <p:cNvPr id="16" name="IE University logo" descr="IE University, School of Science &amp; Technology"/>
+          <p:cNvPicPr>
+            <a:picLocks noChangeAspect="1"/>
+          </p:cNvPicPr>
+          <p:nvPr/>
+        </p:nvPicPr>
+        <p:blipFill>
+          <a:blip r:embed="rId4"/>
+          <a:stretch>
+            <a:fillRect/>
+          </a:stretch>
+        </p:blipFill>
+        <p:spPr>
+          <a:xfrm>
+            <a:off x="8013607" y="92634"/>
+            <a:ext cx="764633" cy="262789"/>
+          </a:xfrm>
+          <a:prstGeom prst="rect">
+            <a:avLst/>
+          </a:prstGeom>
+        </p:spPr>
+      </p:pic>
     </p:spTree>
   </p:cSld>
   <p:clrMapOvr>
@@ -24722,7 +25514,7 @@
                 <a:ea typeface="Calibri" pitchFamily="34" charset="-122"/>
                 <a:cs typeface="Calibri" pitchFamily="34" charset="-120"/>
               </a:rPr>
-              <a:t>Master in Business Analytics and Big Data</a:t>
+              <a:t>Master in Business Analytics and Data Science</a:t>
             </a:r>
             <a:endParaRPr lang="en-US" sz="900" dirty="0"/>
           </a:p>
@@ -24761,7 +25553,7 @@
                 <a:ea typeface="Calibri" pitchFamily="34" charset="-122"/>
                 <a:cs typeface="Calibri" pitchFamily="34" charset="-120"/>
               </a:rPr>
-              <a:t>MLOps · MBABD-PT 2026–27 · Video 2 (Session 12) · AI Governance &amp; Regulatory Readiness · Juan Ramírez</a:t>
+              <a:t>MLOps · MBDS-PT2026F · Video 2 (Session 12) · AI Governance &amp; Regulatory Readiness · Juan Ramírez</a:t>
             </a:r>
             <a:endParaRPr lang="en-US" sz="800" dirty="0"/>
           </a:p>
@@ -24853,7 +25645,7 @@
         </p:nvSpPr>
         <p:spPr>
           <a:xfrm>
-            <a:off x="5806440" y="82296"/>
+            <a:off x="4950367" y="82296"/>
             <a:ext cx="2971800" cy="246888"/>
           </a:xfrm>
           <a:prstGeom prst="roundRect">
@@ -24871,6 +25663,10 @@
             <a:prstDash val="solid"/>
           </a:ln>
         </p:spPr>
+        <p:txBody>
+          <a:bodyPr/>
+          <a:p/>
+        </p:txBody>
       </p:sp>
       <p:sp>
         <p:nvSpPr>
@@ -24880,7 +25676,7 @@
         </p:nvSpPr>
         <p:spPr>
           <a:xfrm>
-            <a:off x="5806440" y="82296"/>
+            <a:off x="4950367" y="82296"/>
             <a:ext cx="2971800" cy="246888"/>
           </a:xfrm>
           <a:prstGeom prst="rect">
@@ -24935,6 +25731,10 @@
             <a:prstDash val="solid"/>
           </a:ln>
         </p:spPr>
+        <p:txBody>
+          <a:bodyPr/>
+          <a:p/>
+        </p:txBody>
       </p:sp>
       <p:sp>
         <p:nvSpPr>
@@ -24999,6 +25799,10 @@
             <a:prstDash val="solid"/>
           </a:ln>
         </p:spPr>
+        <p:txBody>
+          <a:bodyPr/>
+          <a:p/>
+        </p:txBody>
       </p:sp>
       <p:sp>
         <p:nvSpPr>
@@ -25063,6 +25867,10 @@
             <a:prstDash val="solid"/>
           </a:ln>
         </p:spPr>
+        <p:txBody>
+          <a:bodyPr/>
+          <a:p/>
+        </p:txBody>
       </p:sp>
       <p:sp>
         <p:nvSpPr>
@@ -25127,6 +25935,10 @@
             <a:prstDash val="solid"/>
           </a:ln>
         </p:spPr>
+        <p:txBody>
+          <a:bodyPr/>
+          <a:p/>
+        </p:txBody>
       </p:sp>
       <p:sp>
         <p:nvSpPr>
@@ -25362,6 +26174,30 @@
           </a:p>
         </p:txBody>
       </p:sp>
+      <p:pic>
+        <p:nvPicPr>
+          <p:cNvPr id="22" name="IE University logo" descr="IE University, School of Science &amp; Technology"/>
+          <p:cNvPicPr>
+            <a:picLocks noChangeAspect="1"/>
+          </p:cNvPicPr>
+          <p:nvPr/>
+        </p:nvPicPr>
+        <p:blipFill>
+          <a:blip r:embed="rId3"/>
+          <a:stretch>
+            <a:fillRect/>
+          </a:stretch>
+        </p:blipFill>
+        <p:spPr>
+          <a:xfrm>
+            <a:off x="8013607" y="92634"/>
+            <a:ext cx="764633" cy="262789"/>
+          </a:xfrm>
+          <a:prstGeom prst="rect">
+            <a:avLst/>
+          </a:prstGeom>
+        </p:spPr>
+      </p:pic>
     </p:spTree>
   </p:cSld>
   <p:clrMapOvr>
@@ -25427,7 +26263,7 @@
                 <a:ea typeface="Calibri" pitchFamily="34" charset="-122"/>
                 <a:cs typeface="Calibri" pitchFamily="34" charset="-120"/>
               </a:rPr>
-              <a:t>Master in Business Analytics and Big Data</a:t>
+              <a:t>Master in Business Analytics and Data Science</a:t>
             </a:r>
             <a:endParaRPr lang="en-US" sz="900" dirty="0"/>
           </a:p>
@@ -25466,7 +26302,7 @@
                 <a:ea typeface="Calibri" pitchFamily="34" charset="-122"/>
                 <a:cs typeface="Calibri" pitchFamily="34" charset="-120"/>
               </a:rPr>
-              <a:t>MLOps · MBABD-PT 2026–27 · Video 2 (Session 12) · AI Governance &amp; Regulatory Readiness · Juan Ramírez</a:t>
+              <a:t>MLOps · MBDS-PT2026F · Video 2 (Session 12) · AI Governance &amp; Regulatory Readiness · Juan Ramírez</a:t>
             </a:r>
             <a:endParaRPr lang="en-US" sz="800" dirty="0"/>
           </a:p>
@@ -25558,7 +26394,7 @@
         </p:nvSpPr>
         <p:spPr>
           <a:xfrm>
-            <a:off x="5806440" y="82296"/>
+            <a:off x="4950367" y="82296"/>
             <a:ext cx="2971800" cy="246888"/>
           </a:xfrm>
           <a:prstGeom prst="roundRect">
@@ -25576,6 +26412,10 @@
             <a:prstDash val="solid"/>
           </a:ln>
         </p:spPr>
+        <p:txBody>
+          <a:bodyPr/>
+          <a:p/>
+        </p:txBody>
       </p:sp>
       <p:sp>
         <p:nvSpPr>
@@ -25585,7 +26425,7 @@
         </p:nvSpPr>
         <p:spPr>
           <a:xfrm>
-            <a:off x="5806440" y="82296"/>
+            <a:off x="4950367" y="82296"/>
             <a:ext cx="2971800" cy="246888"/>
           </a:xfrm>
           <a:prstGeom prst="rect">
@@ -25640,6 +26480,10 @@
             <a:prstDash val="solid"/>
           </a:ln>
         </p:spPr>
+        <p:txBody>
+          <a:bodyPr/>
+          <a:p/>
+        </p:txBody>
       </p:sp>
       <p:pic>
         <p:nvPicPr>
@@ -25767,6 +26611,10 @@
             <a:prstDash val="solid"/>
           </a:ln>
         </p:spPr>
+        <p:txBody>
+          <a:bodyPr/>
+          <a:p/>
+        </p:txBody>
       </p:sp>
       <p:pic>
         <p:nvPicPr>
@@ -25894,6 +26742,10 @@
             <a:prstDash val="solid"/>
           </a:ln>
         </p:spPr>
+        <p:txBody>
+          <a:bodyPr/>
+          <a:p/>
+        </p:txBody>
       </p:sp>
       <p:pic>
         <p:nvPicPr>
@@ -26021,6 +26873,10 @@
             <a:prstDash val="solid"/>
           </a:ln>
         </p:spPr>
+        <p:txBody>
+          <a:bodyPr/>
+          <a:p/>
+        </p:txBody>
       </p:sp>
       <p:pic>
         <p:nvPicPr>
@@ -26148,6 +27004,10 @@
             <a:prstDash val="solid"/>
           </a:ln>
         </p:spPr>
+        <p:txBody>
+          <a:bodyPr/>
+          <a:p/>
+        </p:txBody>
       </p:sp>
       <p:pic>
         <p:nvPicPr>
@@ -26275,6 +27135,10 @@
             <a:prstDash val="solid"/>
           </a:ln>
         </p:spPr>
+        <p:txBody>
+          <a:bodyPr/>
+          <a:p/>
+        </p:txBody>
       </p:sp>
       <p:pic>
         <p:nvPicPr>
@@ -26402,6 +27266,10 @@
             <a:prstDash val="solid"/>
           </a:ln>
         </p:spPr>
+        <p:txBody>
+          <a:bodyPr/>
+          <a:p/>
+        </p:txBody>
       </p:sp>
       <p:pic>
         <p:nvPicPr>
@@ -26531,6 +27399,10 @@
             <a:prstDash val="solid"/>
           </a:ln>
         </p:spPr>
+        <p:txBody>
+          <a:bodyPr/>
+          <a:p/>
+        </p:txBody>
       </p:sp>
       <p:sp>
         <p:nvSpPr>
@@ -26636,6 +27508,10 @@
             <a:prstDash val="solid"/>
           </a:ln>
         </p:spPr>
+        <p:txBody>
+          <a:bodyPr/>
+          <a:p/>
+        </p:txBody>
       </p:sp>
       <p:sp>
         <p:nvSpPr>
@@ -26754,6 +27630,30 @@
           </a:p>
         </p:txBody>
       </p:sp>
+      <p:pic>
+        <p:nvPicPr>
+          <p:cNvPr id="44" name="IE University logo" descr="IE University, School of Science &amp; Technology"/>
+          <p:cNvPicPr>
+            <a:picLocks noChangeAspect="1"/>
+          </p:cNvPicPr>
+          <p:nvPr/>
+        </p:nvPicPr>
+        <p:blipFill>
+          <a:blip r:embed="rId10"/>
+          <a:stretch>
+            <a:fillRect/>
+          </a:stretch>
+        </p:blipFill>
+        <p:spPr>
+          <a:xfrm>
+            <a:off x="8013607" y="92634"/>
+            <a:ext cx="764633" cy="262789"/>
+          </a:xfrm>
+          <a:prstGeom prst="rect">
+            <a:avLst/>
+          </a:prstGeom>
+        </p:spPr>
+      </p:pic>
     </p:spTree>
   </p:cSld>
   <p:clrMapOvr>
@@ -26819,7 +27719,7 @@
                 <a:ea typeface="Calibri" pitchFamily="34" charset="-122"/>
                 <a:cs typeface="Calibri" pitchFamily="34" charset="-120"/>
               </a:rPr>
-              <a:t>Master in Business Analytics and Big Data</a:t>
+              <a:t>Master in Business Analytics and Data Science</a:t>
             </a:r>
             <a:endParaRPr lang="en-US" sz="900" dirty="0"/>
           </a:p>
@@ -26858,7 +27758,7 @@
                 <a:ea typeface="Calibri" pitchFamily="34" charset="-122"/>
                 <a:cs typeface="Calibri" pitchFamily="34" charset="-120"/>
               </a:rPr>
-              <a:t>MLOps · MBABD-PT 2026–27 · Video 2 (Session 12) · AI Governance &amp; Regulatory Readiness · Juan Ramírez</a:t>
+              <a:t>MLOps · MBDS-PT2026F · Video 2 (Session 12) · AI Governance &amp; Regulatory Readiness · Juan Ramírez</a:t>
             </a:r>
             <a:endParaRPr lang="en-US" sz="800" dirty="0"/>
           </a:p>
@@ -26950,7 +27850,7 @@
         </p:nvSpPr>
         <p:spPr>
           <a:xfrm>
-            <a:off x="5806440" y="82296"/>
+            <a:off x="4950367" y="82296"/>
             <a:ext cx="2971800" cy="246888"/>
           </a:xfrm>
           <a:prstGeom prst="roundRect">
@@ -26968,6 +27868,10 @@
             <a:prstDash val="solid"/>
           </a:ln>
         </p:spPr>
+        <p:txBody>
+          <a:bodyPr/>
+          <a:p/>
+        </p:txBody>
       </p:sp>
       <p:sp>
         <p:nvSpPr>
@@ -26977,7 +27881,7 @@
         </p:nvSpPr>
         <p:spPr>
           <a:xfrm>
-            <a:off x="5806440" y="82296"/>
+            <a:off x="4950367" y="82296"/>
             <a:ext cx="2971800" cy="246888"/>
           </a:xfrm>
           <a:prstGeom prst="rect">
@@ -27034,6 +27938,10 @@
             <a:prstDash val="solid"/>
           </a:ln>
         </p:spPr>
+        <p:txBody>
+          <a:bodyPr/>
+          <a:p/>
+        </p:txBody>
       </p:sp>
       <p:sp>
         <p:nvSpPr>
@@ -27059,6 +27967,10 @@
             <a:prstDash val="solid"/>
           </a:ln>
         </p:spPr>
+        <p:txBody>
+          <a:bodyPr/>
+          <a:p/>
+        </p:txBody>
       </p:sp>
       <p:pic>
         <p:nvPicPr>
@@ -27234,6 +28146,10 @@
             <a:prstDash val="solid"/>
           </a:ln>
         </p:spPr>
+        <p:txBody>
+          <a:bodyPr/>
+          <a:p/>
+        </p:txBody>
       </p:sp>
       <p:sp>
         <p:nvSpPr>
@@ -27259,6 +28175,10 @@
             <a:prstDash val="solid"/>
           </a:ln>
         </p:spPr>
+        <p:txBody>
+          <a:bodyPr/>
+          <a:p/>
+        </p:txBody>
       </p:sp>
       <p:pic>
         <p:nvPicPr>
@@ -27434,6 +28354,10 @@
             <a:prstDash val="solid"/>
           </a:ln>
         </p:spPr>
+        <p:txBody>
+          <a:bodyPr/>
+          <a:p/>
+        </p:txBody>
       </p:sp>
       <p:pic>
         <p:nvPicPr>
@@ -27498,6 +28422,30 @@
           </a:p>
         </p:txBody>
       </p:sp>
+      <p:pic>
+        <p:nvPicPr>
+          <p:cNvPr id="22" name="IE University logo" descr="IE University, School of Science &amp; Technology"/>
+          <p:cNvPicPr>
+            <a:picLocks noChangeAspect="1"/>
+          </p:cNvPicPr>
+          <p:nvPr/>
+        </p:nvPicPr>
+        <p:blipFill>
+          <a:blip r:embed="rId6"/>
+          <a:stretch>
+            <a:fillRect/>
+          </a:stretch>
+        </p:blipFill>
+        <p:spPr>
+          <a:xfrm>
+            <a:off x="8013607" y="92634"/>
+            <a:ext cx="764633" cy="262789"/>
+          </a:xfrm>
+          <a:prstGeom prst="rect">
+            <a:avLst/>
+          </a:prstGeom>
+        </p:spPr>
+      </p:pic>
     </p:spTree>
   </p:cSld>
   <p:clrMapOvr>
@@ -27563,7 +28511,7 @@
                 <a:ea typeface="Calibri" pitchFamily="34" charset="-122"/>
                 <a:cs typeface="Calibri" pitchFamily="34" charset="-120"/>
               </a:rPr>
-              <a:t>Master in Business Analytics and Big Data</a:t>
+              <a:t>Master in Business Analytics and Data Science</a:t>
             </a:r>
             <a:endParaRPr lang="en-US" sz="900" dirty="0"/>
           </a:p>
@@ -27602,7 +28550,7 @@
                 <a:ea typeface="Calibri" pitchFamily="34" charset="-122"/>
                 <a:cs typeface="Calibri" pitchFamily="34" charset="-120"/>
               </a:rPr>
-              <a:t>MLOps · MBABD-PT 2026–27 · Video 2 (Session 12) · AI Governance &amp; Regulatory Readiness · Juan Ramírez</a:t>
+              <a:t>MLOps · MBDS-PT2026F · Video 2 (Session 12) · AI Governance &amp; Regulatory Readiness · Juan Ramírez</a:t>
             </a:r>
             <a:endParaRPr lang="en-US" sz="800" dirty="0"/>
           </a:p>
@@ -27694,7 +28642,7 @@
         </p:nvSpPr>
         <p:spPr>
           <a:xfrm>
-            <a:off x="5806440" y="82296"/>
+            <a:off x="4950367" y="82296"/>
             <a:ext cx="2971800" cy="246888"/>
           </a:xfrm>
           <a:prstGeom prst="roundRect">
@@ -27712,6 +28660,10 @@
             <a:prstDash val="solid"/>
           </a:ln>
         </p:spPr>
+        <p:txBody>
+          <a:bodyPr/>
+          <a:p/>
+        </p:txBody>
       </p:sp>
       <p:sp>
         <p:nvSpPr>
@@ -27721,7 +28673,7 @@
         </p:nvSpPr>
         <p:spPr>
           <a:xfrm>
-            <a:off x="5806440" y="82296"/>
+            <a:off x="4950367" y="82296"/>
             <a:ext cx="2971800" cy="246888"/>
           </a:xfrm>
           <a:prstGeom prst="rect">
@@ -27778,6 +28730,10 @@
             <a:prstDash val="solid"/>
           </a:ln>
         </p:spPr>
+        <p:txBody>
+          <a:bodyPr/>
+          <a:p/>
+        </p:txBody>
       </p:sp>
       <p:sp>
         <p:nvSpPr>
@@ -27922,6 +28878,10 @@
             <a:prstDash val="solid"/>
           </a:ln>
         </p:spPr>
+        <p:txBody>
+          <a:bodyPr/>
+          <a:p/>
+        </p:txBody>
       </p:sp>
       <p:sp>
         <p:nvSpPr>
@@ -28066,6 +29026,10 @@
             <a:prstDash val="solid"/>
           </a:ln>
         </p:spPr>
+        <p:txBody>
+          <a:bodyPr/>
+          <a:p/>
+        </p:txBody>
       </p:sp>
       <p:sp>
         <p:nvSpPr>
@@ -28210,6 +29174,10 @@
             <a:prstDash val="solid"/>
           </a:ln>
         </p:spPr>
+        <p:txBody>
+          <a:bodyPr/>
+          <a:p/>
+        </p:txBody>
       </p:sp>
       <p:sp>
         <p:nvSpPr>
@@ -28354,6 +29322,10 @@
             <a:prstDash val="solid"/>
           </a:ln>
         </p:spPr>
+        <p:txBody>
+          <a:bodyPr/>
+          <a:p/>
+        </p:txBody>
       </p:sp>
       <p:sp>
         <p:nvSpPr>
@@ -28498,6 +29470,10 @@
             <a:prstDash val="solid"/>
           </a:ln>
         </p:spPr>
+        <p:txBody>
+          <a:bodyPr/>
+          <a:p/>
+        </p:txBody>
       </p:sp>
       <p:sp>
         <p:nvSpPr>
@@ -28642,6 +29618,10 @@
             <a:prstDash val="solid"/>
           </a:ln>
         </p:spPr>
+        <p:txBody>
+          <a:bodyPr/>
+          <a:p/>
+        </p:txBody>
       </p:sp>
       <p:pic>
         <p:nvPicPr>
@@ -28706,6 +29686,30 @@
           </a:p>
         </p:txBody>
       </p:sp>
+      <p:pic>
+        <p:nvPicPr>
+          <p:cNvPr id="36" name="IE University logo" descr="IE University, School of Science &amp; Technology"/>
+          <p:cNvPicPr>
+            <a:picLocks noChangeAspect="1"/>
+          </p:cNvPicPr>
+          <p:nvPr/>
+        </p:nvPicPr>
+        <p:blipFill>
+          <a:blip r:embed="rId4"/>
+          <a:stretch>
+            <a:fillRect/>
+          </a:stretch>
+        </p:blipFill>
+        <p:spPr>
+          <a:xfrm>
+            <a:off x="8013607" y="92634"/>
+            <a:ext cx="764633" cy="262789"/>
+          </a:xfrm>
+          <a:prstGeom prst="rect">
+            <a:avLst/>
+          </a:prstGeom>
+        </p:spPr>
+      </p:pic>
     </p:spTree>
   </p:cSld>
   <p:clrMapOvr>

--- a/2026-27/S12/MLOps_S12_Video2_AI_Governance.pptx
+++ b/2026-27/S12/MLOps_S12_Video2_AI_Governance.pptx
@@ -4460,7 +4460,7 @@
       </p:sp>
       <p:sp>
         <p:nvSpPr>
-          <p:cNvPr id="11" name="Shape 7"/>
+          <p:cNvPr id="27" name="Shape 7"/>
           <p:cNvSpPr/>
           <p:nvPr/>
         </p:nvSpPr>
@@ -7473,7 +7473,7 @@
       </p:pic>
       <p:sp>
         <p:nvSpPr>
-          <p:cNvPr id="13" name="Text 8"/>
+          <p:cNvPr id="21" name="Text 8"/>
           <p:cNvSpPr txBox="1"/>
           <p:nvPr/>
         </p:nvSpPr>
@@ -12421,7 +12421,7 @@
       </p:sp>
       <p:sp>
         <p:nvSpPr>
-          <p:cNvPr id="16" name="Shape 11"/>
+          <p:cNvPr id="25" name="Shape 11"/>
           <p:cNvSpPr/>
           <p:nvPr/>
         </p:nvSpPr>
@@ -18271,7 +18271,7 @@
       </p:sp>
       <p:graphicFrame>
         <p:nvGraphicFramePr>
-          <p:cNvPr id="3" name="Table 0"/>
+          <p:cNvPr id="22" name="Table 0"/>
           <p:cNvGraphicFramePr>
             <a:graphicFrameLocks noGrp="1"/>
           </p:cNvGraphicFramePr>

--- a/2026-27/S12/MLOps_S12_Video2_AI_Governance.pptx
+++ b/2026-27/S12/MLOps_S12_Video2_AI_Governance.pptx
@@ -4,6 +4,9 @@
   <p:sldMasterIdLst>
     <p:sldMasterId id="2147483648" r:id="rId1"/>
   </p:sldMasterIdLst>
+  <p:notesMasterIdLst>
+    <p:notesMasterId r:id="rId22"/>
+  </p:notesMasterIdLst>
   <p:sldIdLst>
     <p:sldId id="256" r:id="rId2"/>
     <p:sldId id="257" r:id="rId3"/>
@@ -26,9 +29,6 @@
     <p:sldId id="274" r:id="rId20"/>
     <p:sldId id="275" r:id="rId21"/>
   </p:sldIdLst>
-  <p:notesMasterIdLst>
-    <p:notesMasterId r:id="rId22"/>
-  </p:notesMasterIdLst>
   <p:sldSz cx="9144000" cy="5143500"/>
   <p:notesSz cx="5143500" cy="9144000"/>
   <p:defaultTextStyle>
@@ -148,234 +148,10 @@
           <a:chExt cx="0" cy="0"/>
         </a:xfrm>
       </p:grpSpPr>
-      <p:sp>
-        <p:nvSpPr>
-          <p:cNvPr id="2" name="Header Placeholder 1"/>
-          <p:cNvSpPr>
-            <a:spLocks noGrp="1"/>
-          </p:cNvSpPr>
-          <p:nvPr>
-            <p:ph type="hdr" sz="quarter"/>
-          </p:nvPr>
-        </p:nvSpPr>
-        <p:spPr>
-          <a:xfrm>
-            <a:off x="0" y="0"/>
-            <a:ext cx="2971800" cy="458788"/>
-          </a:xfrm>
-          <a:prstGeom prst="rect">
-            <a:avLst/>
-          </a:prstGeom>
-        </p:spPr>
-        <p:txBody>
-          <a:bodyPr vert="horz" lIns="91440" tIns="45720" rIns="91440" bIns="45720" rtlCol="0"/>
-          <a:lstStyle>
-            <a:lvl1pPr algn="l">
-              <a:defRPr sz="1200"/>
-            </a:lvl1pPr>
-          </a:lstStyle>
-          <a:p>
-            <a:endParaRPr lang="en-US"/>
-          </a:p>
-        </p:txBody>
-      </p:sp>
-      <p:sp>
-        <p:nvSpPr>
-          <p:cNvPr id="3" name="Date Placeholder 2"/>
-          <p:cNvSpPr>
-            <a:spLocks noGrp="1"/>
-          </p:cNvSpPr>
-          <p:nvPr>
-            <p:ph type="dt" idx="1"/>
-          </p:nvPr>
-        </p:nvSpPr>
-        <p:spPr>
-          <a:xfrm>
-            <a:off x="3884613" y="0"/>
-            <a:ext cx="2971800" cy="458788"/>
-          </a:xfrm>
-          <a:prstGeom prst="rect">
-            <a:avLst/>
-          </a:prstGeom>
-        </p:spPr>
-        <p:txBody>
-          <a:bodyPr vert="horz" lIns="91440" tIns="45720" rIns="91440" bIns="45720" rtlCol="0"/>
-          <a:lstStyle>
-            <a:lvl1pPr algn="r">
-              <a:defRPr sz="1200"/>
-            </a:lvl1pPr>
-          </a:lstStyle>
-          <a:p>
-            <a:fld id="{5282F153-3F37-0F45-9E97-73ACFA13230C}" type="datetimeFigureOut">
-              <a:rPr lang="en-US"/>
-              <a:t>7/23/19</a:t>
-            </a:fld>
-            <a:endParaRPr lang="en-US"/>
-          </a:p>
-        </p:txBody>
-      </p:sp>
-      <p:sp>
-        <p:nvSpPr>
-          <p:cNvPr id="4" name="Slide Image Placeholder 3"/>
-          <p:cNvSpPr>
-            <a:spLocks noGrp="1" noRot="1" noChangeAspect="1"/>
-          </p:cNvSpPr>
-          <p:nvPr>
-            <p:ph type="sldImg" idx="2"/>
-          </p:nvPr>
-        </p:nvSpPr>
-        <p:spPr>
-          <a:xfrm>
-            <a:off x="685800" y="1143000"/>
-            <a:ext cx="5486400" cy="3086100"/>
-          </a:xfrm>
-          <a:prstGeom prst="rect">
-            <a:avLst/>
-          </a:prstGeom>
-          <a:noFill/>
-          <a:ln w="12700">
-            <a:solidFill>
-              <a:prstClr val="black"/>
-            </a:solidFill>
-          </a:ln>
-        </p:spPr>
-        <p:txBody>
-          <a:bodyPr vert="horz" lIns="91440" tIns="45720" rIns="91440" bIns="45720" rtlCol="0" anchor="ctr"/>
-          <a:lstStyle/>
-          <a:p>
-            <a:endParaRPr lang="en-US"/>
-          </a:p>
-        </p:txBody>
-      </p:sp>
-      <p:sp>
-        <p:nvSpPr>
-          <p:cNvPr id="5" name="Notes Placeholder 4"/>
-          <p:cNvSpPr>
-            <a:spLocks noGrp="1"/>
-          </p:cNvSpPr>
-          <p:nvPr>
-            <p:ph type="body" sz="quarter" idx="3"/>
-          </p:nvPr>
-        </p:nvSpPr>
-        <p:spPr>
-          <a:xfrm>
-            <a:off x="685800" y="4400550"/>
-            <a:ext cx="5486400" cy="3600450"/>
-          </a:xfrm>
-          <a:prstGeom prst="rect">
-            <a:avLst/>
-          </a:prstGeom>
-        </p:spPr>
-        <p:txBody>
-          <a:bodyPr vert="horz" lIns="91440" tIns="45720" rIns="91440" bIns="45720" rtlCol="0"/>
-          <a:lstStyle/>
-          <a:p>
-            <a:pPr lvl="0"/>
-            <a:r>
-              <a:rPr lang="en-US"/>
-              <a:t>Click to edit Master text styles</a:t>
-            </a:r>
-          </a:p>
-          <a:p>
-            <a:pPr lvl="1"/>
-            <a:r>
-              <a:rPr lang="en-US"/>
-              <a:t>Second level</a:t>
-            </a:r>
-          </a:p>
-          <a:p>
-            <a:pPr lvl="2"/>
-            <a:r>
-              <a:rPr lang="en-US"/>
-              <a:t>Third level</a:t>
-            </a:r>
-          </a:p>
-          <a:p>
-            <a:pPr lvl="3"/>
-            <a:r>
-              <a:rPr lang="en-US"/>
-              <a:t>Fourth level</a:t>
-            </a:r>
-          </a:p>
-          <a:p>
-            <a:pPr lvl="4"/>
-            <a:r>
-              <a:rPr lang="en-US"/>
-              <a:t>Fifth level</a:t>
-            </a:r>
-          </a:p>
-        </p:txBody>
-      </p:sp>
-      <p:sp>
-        <p:nvSpPr>
-          <p:cNvPr id="6" name="Footer Placeholder 5"/>
-          <p:cNvSpPr>
-            <a:spLocks noGrp="1"/>
-          </p:cNvSpPr>
-          <p:nvPr>
-            <p:ph type="ftr" sz="quarter" idx="4"/>
-          </p:nvPr>
-        </p:nvSpPr>
-        <p:spPr>
-          <a:xfrm>
-            <a:off x="0" y="8685213"/>
-            <a:ext cx="2971800" cy="458787"/>
-          </a:xfrm>
-          <a:prstGeom prst="rect">
-            <a:avLst/>
-          </a:prstGeom>
-        </p:spPr>
-        <p:txBody>
-          <a:bodyPr vert="horz" lIns="91440" tIns="45720" rIns="91440" bIns="45720" rtlCol="0" anchor="b"/>
-          <a:lstStyle>
-            <a:lvl1pPr algn="l">
-              <a:defRPr sz="1200"/>
-            </a:lvl1pPr>
-          </a:lstStyle>
-          <a:p>
-            <a:endParaRPr lang="en-US"/>
-          </a:p>
-        </p:txBody>
-      </p:sp>
-      <p:sp>
-        <p:nvSpPr>
-          <p:cNvPr id="7" name="Slide Number Placeholder 6"/>
-          <p:cNvSpPr>
-            <a:spLocks noGrp="1"/>
-          </p:cNvSpPr>
-          <p:nvPr>
-            <p:ph type="sldNum" sz="quarter" idx="5"/>
-          </p:nvPr>
-        </p:nvSpPr>
-        <p:spPr>
-          <a:xfrm>
-            <a:off x="3884613" y="8685213"/>
-            <a:ext cx="2971800" cy="458787"/>
-          </a:xfrm>
-          <a:prstGeom prst="rect">
-            <a:avLst/>
-          </a:prstGeom>
-        </p:spPr>
-        <p:txBody>
-          <a:bodyPr vert="horz" lIns="91440" tIns="45720" rIns="91440" bIns="45720" rtlCol="0" anchor="b"/>
-          <a:lstStyle>
-            <a:lvl1pPr algn="r">
-              <a:defRPr sz="1200"/>
-            </a:lvl1pPr>
-          </a:lstStyle>
-          <a:p>
-            <a:fld id="{CE5E9CC1-C706-0F49-92D6-E571CC5EEA8F}" type="slidenum">
-              <a:rPr lang="en-US"/>
-              <a:t>‹#›</a:t>
-            </a:fld>
-            <a:endParaRPr lang="en-US"/>
-          </a:p>
-        </p:txBody>
-      </p:sp>
     </p:spTree>
     <p:extLst>
       <p:ext uri="{BB962C8B-B14F-4D97-AF65-F5344CB8AC3E}">
-        <p14:creationId xmlns:p14="http://schemas.microsoft.com/office/powerpoint/2010/main" val="1024086991"/>
+        <p14:creationId xmlns:p14="http://schemas.microsoft.com/office/powerpoint/2010/main" val="1133880120"/>
       </p:ext>
     </p:extLst>
   </p:cSld>
@@ -30011,4 +29787,319 @@
     </a:ext>
   </a:extLst>
 </a:theme>
+</file>
+
+<file path=ppt/theme/theme2.xml><?xml version="1.0" encoding="utf-8"?>
+<a:theme xmlns:a="http://schemas.openxmlformats.org/drawingml/2006/main" name="Office Theme">
+  <a:themeElements>
+    <a:clrScheme name="Office">
+      <a:dk1>
+        <a:sysClr val="windowText" lastClr="000000"/>
+      </a:dk1>
+      <a:lt1>
+        <a:sysClr val="window" lastClr="FFFFFF"/>
+      </a:lt1>
+      <a:dk2>
+        <a:srgbClr val="0E2841"/>
+      </a:dk2>
+      <a:lt2>
+        <a:srgbClr val="E8E8E8"/>
+      </a:lt2>
+      <a:accent1>
+        <a:srgbClr val="156082"/>
+      </a:accent1>
+      <a:accent2>
+        <a:srgbClr val="E97132"/>
+      </a:accent2>
+      <a:accent3>
+        <a:srgbClr val="196B24"/>
+      </a:accent3>
+      <a:accent4>
+        <a:srgbClr val="0F9ED5"/>
+      </a:accent4>
+      <a:accent5>
+        <a:srgbClr val="A02B93"/>
+      </a:accent5>
+      <a:accent6>
+        <a:srgbClr val="4EA72E"/>
+      </a:accent6>
+      <a:hlink>
+        <a:srgbClr val="467886"/>
+      </a:hlink>
+      <a:folHlink>
+        <a:srgbClr val="96607D"/>
+      </a:folHlink>
+    </a:clrScheme>
+    <a:fontScheme name="Office">
+      <a:majorFont>
+        <a:latin typeface="Aptos Display" panose="02110004020202020204"/>
+        <a:ea typeface=""/>
+        <a:cs typeface=""/>
+        <a:font script="Jpan" typeface="游ゴシック Light"/>
+        <a:font script="Hang" typeface="맑은 고딕"/>
+        <a:font script="Hans" typeface="等线 Light"/>
+        <a:font script="Hant" typeface="新細明體"/>
+        <a:font script="Arab" typeface="Times New Roman"/>
+        <a:font script="Hebr" typeface="Times New Roman"/>
+        <a:font script="Thai" typeface="Angsana New"/>
+        <a:font script="Ethi" typeface="Nyala"/>
+        <a:font script="Beng" typeface="Vrinda"/>
+        <a:font script="Gujr" typeface="Shruti"/>
+        <a:font script="Khmr" typeface="MoolBoran"/>
+        <a:font script="Knda" typeface="Tunga"/>
+        <a:font script="Guru" typeface="Raavi"/>
+        <a:font script="Cans" typeface="Euphemia"/>
+        <a:font script="Cher" typeface="Plantagenet Cherokee"/>
+        <a:font script="Yiii" typeface="Microsoft Yi Baiti"/>
+        <a:font script="Tibt" typeface="Microsoft Himalaya"/>
+        <a:font script="Thaa" typeface="MV Boli"/>
+        <a:font script="Deva" typeface="Mangal"/>
+        <a:font script="Telu" typeface="Gautami"/>
+        <a:font script="Taml" typeface="Latha"/>
+        <a:font script="Syrc" typeface="Estrangelo Edessa"/>
+        <a:font script="Orya" typeface="Kalinga"/>
+        <a:font script="Mlym" typeface="Kartika"/>
+        <a:font script="Laoo" typeface="DokChampa"/>
+        <a:font script="Sinh" typeface="Iskoola Pota"/>
+        <a:font script="Mong" typeface="Mongolian Baiti"/>
+        <a:font script="Viet" typeface="Times New Roman"/>
+        <a:font script="Uigh" typeface="Microsoft Uighur"/>
+        <a:font script="Geor" typeface="Sylfaen"/>
+        <a:font script="Armn" typeface="Arial"/>
+        <a:font script="Bugi" typeface="Leelawadee UI"/>
+        <a:font script="Bopo" typeface="Microsoft JhengHei"/>
+        <a:font script="Java" typeface="Javanese Text"/>
+        <a:font script="Lisu" typeface="Segoe UI"/>
+        <a:font script="Mymr" typeface="Myanmar Text"/>
+        <a:font script="Nkoo" typeface="Ebrima"/>
+        <a:font script="Olck" typeface="Nirmala UI"/>
+        <a:font script="Osma" typeface="Ebrima"/>
+        <a:font script="Phag" typeface="Phagspa"/>
+        <a:font script="Syrn" typeface="Estrangelo Edessa"/>
+        <a:font script="Syrj" typeface="Estrangelo Edessa"/>
+        <a:font script="Syre" typeface="Estrangelo Edessa"/>
+        <a:font script="Sora" typeface="Nirmala UI"/>
+        <a:font script="Tale" typeface="Microsoft Tai Le"/>
+        <a:font script="Talu" typeface="Microsoft New Tai Lue"/>
+        <a:font script="Tfng" typeface="Ebrima"/>
+      </a:majorFont>
+      <a:minorFont>
+        <a:latin typeface="Aptos" panose="02110004020202020204"/>
+        <a:ea typeface=""/>
+        <a:cs typeface=""/>
+        <a:font script="Jpan" typeface="游ゴシック"/>
+        <a:font script="Hang" typeface="맑은 고딕"/>
+        <a:font script="Hans" typeface="等线"/>
+        <a:font script="Hant" typeface="新細明體"/>
+        <a:font script="Arab" typeface="Arial"/>
+        <a:font script="Hebr" typeface="Arial"/>
+        <a:font script="Thai" typeface="Cordia New"/>
+        <a:font script="Ethi" typeface="Nyala"/>
+        <a:font script="Beng" typeface="Vrinda"/>
+        <a:font script="Gujr" typeface="Shruti"/>
+        <a:font script="Khmr" typeface="DaunPenh"/>
+        <a:font script="Knda" typeface="Tunga"/>
+        <a:font script="Guru" typeface="Raavi"/>
+        <a:font script="Cans" typeface="Euphemia"/>
+        <a:font script="Cher" typeface="Plantagenet Cherokee"/>
+        <a:font script="Yiii" typeface="Microsoft Yi Baiti"/>
+        <a:font script="Tibt" typeface="Microsoft Himalaya"/>
+        <a:font script="Thaa" typeface="MV Boli"/>
+        <a:font script="Deva" typeface="Mangal"/>
+        <a:font script="Telu" typeface="Gautami"/>
+        <a:font script="Taml" typeface="Latha"/>
+        <a:font script="Syrc" typeface="Estrangelo Edessa"/>
+        <a:font script="Orya" typeface="Kalinga"/>
+        <a:font script="Mlym" typeface="Kartika"/>
+        <a:font script="Laoo" typeface="DokChampa"/>
+        <a:font script="Sinh" typeface="Iskoola Pota"/>
+        <a:font script="Mong" typeface="Mongolian Baiti"/>
+        <a:font script="Viet" typeface="Arial"/>
+        <a:font script="Uigh" typeface="Microsoft Uighur"/>
+        <a:font script="Geor" typeface="Sylfaen"/>
+        <a:font script="Armn" typeface="Arial"/>
+        <a:font script="Bugi" typeface="Leelawadee UI"/>
+        <a:font script="Bopo" typeface="Microsoft JhengHei"/>
+        <a:font script="Java" typeface="Javanese Text"/>
+        <a:font script="Lisu" typeface="Segoe UI"/>
+        <a:font script="Mymr" typeface="Myanmar Text"/>
+        <a:font script="Nkoo" typeface="Ebrima"/>
+        <a:font script="Olck" typeface="Nirmala UI"/>
+        <a:font script="Osma" typeface="Ebrima"/>
+        <a:font script="Phag" typeface="Phagspa"/>
+        <a:font script="Syrn" typeface="Estrangelo Edessa"/>
+        <a:font script="Syrj" typeface="Estrangelo Edessa"/>
+        <a:font script="Syre" typeface="Estrangelo Edessa"/>
+        <a:font script="Sora" typeface="Nirmala UI"/>
+        <a:font script="Tale" typeface="Microsoft Tai Le"/>
+        <a:font script="Talu" typeface="Microsoft New Tai Lue"/>
+        <a:font script="Tfng" typeface="Ebrima"/>
+      </a:minorFont>
+    </a:fontScheme>
+    <a:fmtScheme name="Office">
+      <a:fillStyleLst>
+        <a:solidFill>
+          <a:schemeClr val="phClr"/>
+        </a:solidFill>
+        <a:gradFill rotWithShape="1">
+          <a:gsLst>
+            <a:gs pos="0">
+              <a:schemeClr val="phClr">
+                <a:lumMod val="110000"/>
+                <a:satMod val="105000"/>
+                <a:tint val="67000"/>
+              </a:schemeClr>
+            </a:gs>
+            <a:gs pos="50000">
+              <a:schemeClr val="phClr">
+                <a:lumMod val="105000"/>
+                <a:satMod val="103000"/>
+                <a:tint val="73000"/>
+              </a:schemeClr>
+            </a:gs>
+            <a:gs pos="100000">
+              <a:schemeClr val="phClr">
+                <a:lumMod val="105000"/>
+                <a:satMod val="109000"/>
+                <a:tint val="81000"/>
+              </a:schemeClr>
+            </a:gs>
+          </a:gsLst>
+          <a:lin ang="5400000" scaled="0"/>
+        </a:gradFill>
+        <a:gradFill rotWithShape="1">
+          <a:gsLst>
+            <a:gs pos="0">
+              <a:schemeClr val="phClr">
+                <a:satMod val="103000"/>
+                <a:lumMod val="102000"/>
+                <a:tint val="94000"/>
+              </a:schemeClr>
+            </a:gs>
+            <a:gs pos="50000">
+              <a:schemeClr val="phClr">
+                <a:satMod val="110000"/>
+                <a:lumMod val="100000"/>
+                <a:shade val="100000"/>
+              </a:schemeClr>
+            </a:gs>
+            <a:gs pos="100000">
+              <a:schemeClr val="phClr">
+                <a:lumMod val="99000"/>
+                <a:satMod val="120000"/>
+                <a:shade val="78000"/>
+              </a:schemeClr>
+            </a:gs>
+          </a:gsLst>
+          <a:lin ang="5400000" scaled="0"/>
+        </a:gradFill>
+      </a:fillStyleLst>
+      <a:lnStyleLst>
+        <a:ln w="12700" cap="flat" cmpd="sng" algn="ctr">
+          <a:solidFill>
+            <a:schemeClr val="phClr"/>
+          </a:solidFill>
+          <a:prstDash val="solid"/>
+          <a:miter lim="800000"/>
+        </a:ln>
+        <a:ln w="19050" cap="flat" cmpd="sng" algn="ctr">
+          <a:solidFill>
+            <a:schemeClr val="phClr"/>
+          </a:solidFill>
+          <a:prstDash val="solid"/>
+          <a:miter lim="800000"/>
+        </a:ln>
+        <a:ln w="25400" cap="flat" cmpd="sng" algn="ctr">
+          <a:solidFill>
+            <a:schemeClr val="phClr"/>
+          </a:solidFill>
+          <a:prstDash val="solid"/>
+          <a:miter lim="800000"/>
+        </a:ln>
+      </a:lnStyleLst>
+      <a:effectStyleLst>
+        <a:effectStyle>
+          <a:effectLst/>
+        </a:effectStyle>
+        <a:effectStyle>
+          <a:effectLst/>
+        </a:effectStyle>
+        <a:effectStyle>
+          <a:effectLst>
+            <a:outerShdw blurRad="57150" dist="19050" dir="5400000" algn="ctr" rotWithShape="0">
+              <a:srgbClr val="000000">
+                <a:alpha val="63000"/>
+              </a:srgbClr>
+            </a:outerShdw>
+          </a:effectLst>
+        </a:effectStyle>
+      </a:effectStyleLst>
+      <a:bgFillStyleLst>
+        <a:solidFill>
+          <a:schemeClr val="phClr"/>
+        </a:solidFill>
+        <a:solidFill>
+          <a:schemeClr val="phClr">
+            <a:tint val="95000"/>
+            <a:satMod val="170000"/>
+          </a:schemeClr>
+        </a:solidFill>
+        <a:gradFill rotWithShape="1">
+          <a:gsLst>
+            <a:gs pos="0">
+              <a:schemeClr val="phClr">
+                <a:tint val="93000"/>
+                <a:satMod val="150000"/>
+                <a:shade val="98000"/>
+                <a:lumMod val="102000"/>
+              </a:schemeClr>
+            </a:gs>
+            <a:gs pos="50000">
+              <a:schemeClr val="phClr">
+                <a:tint val="98000"/>
+                <a:satMod val="130000"/>
+                <a:shade val="90000"/>
+                <a:lumMod val="103000"/>
+              </a:schemeClr>
+            </a:gs>
+            <a:gs pos="100000">
+              <a:schemeClr val="phClr">
+                <a:shade val="63000"/>
+                <a:satMod val="120000"/>
+              </a:schemeClr>
+            </a:gs>
+          </a:gsLst>
+          <a:lin ang="5400000" scaled="0"/>
+        </a:gradFill>
+      </a:bgFillStyleLst>
+    </a:fmtScheme>
+  </a:themeElements>
+  <a:objectDefaults>
+    <a:lnDef>
+      <a:spPr/>
+      <a:bodyPr/>
+      <a:lstStyle/>
+      <a:style>
+        <a:lnRef idx="2">
+          <a:schemeClr val="accent1"/>
+        </a:lnRef>
+        <a:fillRef idx="0">
+          <a:schemeClr val="accent1"/>
+        </a:fillRef>
+        <a:effectRef idx="1">
+          <a:schemeClr val="accent1"/>
+        </a:effectRef>
+        <a:fontRef idx="minor">
+          <a:schemeClr val="tx1"/>
+        </a:fontRef>
+      </a:style>
+    </a:lnDef>
+  </a:objectDefaults>
+  <a:extraClrSchemeLst/>
+  <a:extLst>
+    <a:ext uri="{05A4C25C-085E-4340-85A3-A5531E510DB2}">
+      <thm15:themeFamily xmlns:thm15="http://schemas.microsoft.com/office/thememl/2012/main" name="Office Theme" id="{2E142A2C-CD16-42D6-873A-C26D2A0506FA}" vid="{1BDDFF52-6CD6-40A5-AB3C-68EB2F1E4D0A}"/>
+    </a:ext>
+  </a:extLst>
+</a:theme>
 </file>